--- a/output_pptx/Lord_I_Need_You.pptx
+++ b/output_pptx/Lord_I_Need_You.pptx
@@ -21,6 +21,8 @@
     <p:sldId id="269" r:id="rId20"/>
     <p:sldId id="270" r:id="rId21"/>
     <p:sldId id="271" r:id="rId22"/>
+    <p:sldId id="272" r:id="rId23"/>
+    <p:sldId id="273" r:id="rId24"/>
   </p:sldIdLst>
   <p:sldSz cx="12191695" cy="6858000" type="screen4x3"/>
   <p:notesSz cx="6858000" cy="9144000"/>
@@ -3119,23 +3121,23 @@
         </p:nvSpPr>
         <p:spPr>
           <a:xfrm>
-            <a:off x="594360" y="2258568"/>
-            <a:ext cx="11002975" cy="685800"/>
-          </a:xfrm>
-          <a:prstGeom prst="rect">
-            <a:avLst/>
-          </a:prstGeom>
-          <a:noFill/>
-        </p:spPr>
-        <p:txBody>
-          <a:bodyPr wrap="square">
-            <a:spAutoFit/>
-          </a:bodyPr>
-          <a:lstStyle/>
-          <a:p>
-            <a:pPr algn="ctr"/>
-            <a:r>
-              <a:rPr sz="4400" b="1" i="0">
+            <a:off x="640080" y="2052828"/>
+            <a:ext cx="10911535" cy="731520"/>
+          </a:xfrm>
+          <a:prstGeom prst="rect">
+            <a:avLst/>
+          </a:prstGeom>
+          <a:noFill/>
+        </p:spPr>
+        <p:txBody>
+          <a:bodyPr wrap="square">
+            <a:spAutoFit/>
+          </a:bodyPr>
+          <a:lstStyle/>
+          <a:p>
+            <a:pPr algn="ctr"/>
+            <a:r>
+              <a:rPr sz="4800" b="1" i="0">
                 <a:solidFill>
                   <a:srgbClr val="FFFFFF"/>
                 </a:solidFill>
@@ -3154,29 +3156,29 @@
         </p:nvSpPr>
         <p:spPr>
           <a:xfrm>
-            <a:off x="594360" y="2980944"/>
-            <a:ext cx="11002975" cy="347472"/>
-          </a:xfrm>
-          <a:prstGeom prst="rect">
-            <a:avLst/>
-          </a:prstGeom>
-          <a:noFill/>
-        </p:spPr>
-        <p:txBody>
-          <a:bodyPr wrap="square">
-            <a:spAutoFit/>
-          </a:bodyPr>
-          <a:lstStyle/>
-          <a:p>
-            <a:pPr algn="ctr"/>
-            <a:r>
-              <a:rPr sz="2200" b="0" i="1">
-                <a:solidFill>
-                  <a:srgbClr val="8C8C8C"/>
-                </a:solidFill>
-                <a:latin typeface="Arial"/>
-              </a:rPr>
-              <a:t/>
+            <a:off x="640080" y="2985516"/>
+            <a:ext cx="10911535" cy="731520"/>
+          </a:xfrm>
+          <a:prstGeom prst="rect">
+            <a:avLst/>
+          </a:prstGeom>
+          <a:noFill/>
+        </p:spPr>
+        <p:txBody>
+          <a:bodyPr wrap="square">
+            <a:spAutoFit/>
+          </a:bodyPr>
+          <a:lstStyle/>
+          <a:p>
+            <a:pPr algn="ctr"/>
+            <a:r>
+              <a:rPr sz="4800" b="1" i="0">
+                <a:solidFill>
+                  <a:srgbClr val="FFFFFF"/>
+                </a:solidFill>
+                <a:latin typeface="Arial"/>
+              </a:rPr>
+              <a:t>Pra minha alma descansar</a:t>
             </a:r>
           </a:p>
         </p:txBody>
@@ -3189,29 +3191,29 @@
         </p:nvSpPr>
         <p:spPr>
           <a:xfrm>
-            <a:off x="594360" y="3529584"/>
-            <a:ext cx="11002975" cy="685800"/>
-          </a:xfrm>
-          <a:prstGeom prst="rect">
-            <a:avLst/>
-          </a:prstGeom>
-          <a:noFill/>
-        </p:spPr>
-        <p:txBody>
-          <a:bodyPr wrap="square">
-            <a:spAutoFit/>
-          </a:bodyPr>
-          <a:lstStyle/>
-          <a:p>
-            <a:pPr algn="ctr"/>
-            <a:r>
-              <a:rPr sz="4400" b="1" i="0">
-                <a:solidFill>
-                  <a:srgbClr val="FFFFFF"/>
-                </a:solidFill>
-                <a:latin typeface="Arial"/>
-              </a:rPr>
-              <a:t>Pra minha alma descansar</a:t>
+            <a:off x="640080" y="4128516"/>
+            <a:ext cx="10911535" cy="310896"/>
+          </a:xfrm>
+          <a:prstGeom prst="rect">
+            <a:avLst/>
+          </a:prstGeom>
+          <a:noFill/>
+        </p:spPr>
+        <p:txBody>
+          <a:bodyPr wrap="square">
+            <a:spAutoFit/>
+          </a:bodyPr>
+          <a:lstStyle/>
+          <a:p>
+            <a:pPr algn="ctr"/>
+            <a:r>
+              <a:rPr sz="2000" b="0" i="0">
+                <a:solidFill>
+                  <a:srgbClr val="828282"/>
+                </a:solidFill>
+                <a:latin typeface="Arial"/>
+              </a:rPr>
+              <a:t>御前に　ひれ伏し　やすらぎ　みつける</a:t>
             </a:r>
           </a:p>
         </p:txBody>
@@ -3224,29 +3226,29 @@
         </p:nvSpPr>
         <p:spPr>
           <a:xfrm>
-            <a:off x="594360" y="4251960"/>
-            <a:ext cx="11002975" cy="347472"/>
-          </a:xfrm>
-          <a:prstGeom prst="rect">
-            <a:avLst/>
-          </a:prstGeom>
-          <a:noFill/>
-        </p:spPr>
-        <p:txBody>
-          <a:bodyPr wrap="square">
-            <a:spAutoFit/>
-          </a:bodyPr>
-          <a:lstStyle/>
-          <a:p>
-            <a:pPr algn="ctr"/>
-            <a:r>
-              <a:rPr sz="2200" b="0" i="1">
-                <a:solidFill>
-                  <a:srgbClr val="8C8C8C"/>
-                </a:solidFill>
-                <a:latin typeface="Arial"/>
-              </a:rPr>
-              <a:t/>
+            <a:off x="640080" y="4494276"/>
+            <a:ext cx="10911535" cy="310896"/>
+          </a:xfrm>
+          <a:prstGeom prst="rect">
+            <a:avLst/>
+          </a:prstGeom>
+          <a:noFill/>
+        </p:spPr>
+        <p:txBody>
+          <a:bodyPr wrap="square">
+            <a:spAutoFit/>
+          </a:bodyPr>
+          <a:lstStyle/>
+          <a:p>
+            <a:pPr algn="ctr"/>
+            <a:r>
+              <a:rPr sz="2000" b="0" i="0">
+                <a:solidFill>
+                  <a:srgbClr val="828282"/>
+                </a:solidFill>
+                <a:latin typeface="Arial"/>
+              </a:rPr>
+              <a:t>主なしでは　砕かれ　主だけが みちびく</a:t>
             </a:r>
           </a:p>
         </p:txBody>
@@ -3285,29 +3287,29 @@
         </p:nvSpPr>
         <p:spPr>
           <a:xfrm>
-            <a:off x="594360" y="2258568"/>
-            <a:ext cx="11002975" cy="685800"/>
-          </a:xfrm>
-          <a:prstGeom prst="rect">
-            <a:avLst/>
-          </a:prstGeom>
-          <a:noFill/>
-        </p:spPr>
-        <p:txBody>
-          <a:bodyPr wrap="square">
-            <a:spAutoFit/>
-          </a:bodyPr>
-          <a:lstStyle/>
-          <a:p>
-            <a:pPr algn="ctr"/>
-            <a:r>
-              <a:rPr sz="4400" b="1" i="0">
+            <a:off x="640080" y="1650492"/>
+            <a:ext cx="10911535" cy="731520"/>
+          </a:xfrm>
+          <a:prstGeom prst="rect">
+            <a:avLst/>
+          </a:prstGeom>
+          <a:noFill/>
+        </p:spPr>
+        <p:txBody>
+          <a:bodyPr wrap="square">
+            <a:spAutoFit/>
+          </a:bodyPr>
+          <a:lstStyle/>
+          <a:p>
+            <a:pPr algn="ctr"/>
+            <a:r>
+              <a:rPr sz="4800" b="1" i="0">
                 <a:solidFill>
                   <a:srgbClr val="FFFFFF"/>
                 </a:solidFill>
                 <a:latin typeface="Arial"/>
               </a:rPr>
-              <a:t>E onde há graça, Tu estás</a:t>
+              <a:t>倒れるときでさえ</a:t>
             </a:r>
           </a:p>
         </p:txBody>
@@ -3320,29 +3322,29 @@
         </p:nvSpPr>
         <p:spPr>
           <a:xfrm>
-            <a:off x="594360" y="2980944"/>
-            <a:ext cx="11002975" cy="347472"/>
-          </a:xfrm>
-          <a:prstGeom prst="rect">
-            <a:avLst/>
-          </a:prstGeom>
-          <a:noFill/>
-        </p:spPr>
-        <p:txBody>
-          <a:bodyPr wrap="square">
-            <a:spAutoFit/>
-          </a:bodyPr>
-          <a:lstStyle/>
-          <a:p>
-            <a:pPr algn="ctr"/>
-            <a:r>
-              <a:rPr sz="2200" b="0" i="1">
-                <a:solidFill>
-                  <a:srgbClr val="8C8C8C"/>
-                </a:solidFill>
-                <a:latin typeface="Arial"/>
-              </a:rPr>
-              <a:t/>
+            <a:off x="640080" y="2418588"/>
+            <a:ext cx="10911535" cy="365760"/>
+          </a:xfrm>
+          <a:prstGeom prst="rect">
+            <a:avLst/>
+          </a:prstGeom>
+          <a:noFill/>
+        </p:spPr>
+        <p:txBody>
+          <a:bodyPr wrap="square">
+            <a:spAutoFit/>
+          </a:bodyPr>
+          <a:lstStyle/>
+          <a:p>
+            <a:pPr algn="ctr"/>
+            <a:r>
+              <a:rPr sz="2400" b="0" i="1">
+                <a:solidFill>
+                  <a:srgbClr val="AAAAAA"/>
+                </a:solidFill>
+                <a:latin typeface="Arial"/>
+              </a:rPr>
+              <a:t>Taoreru Toki de sae</a:t>
             </a:r>
           </a:p>
         </p:txBody>
@@ -3355,29 +3357,29 @@
         </p:nvSpPr>
         <p:spPr>
           <a:xfrm>
-            <a:off x="594360" y="3529584"/>
-            <a:ext cx="11002975" cy="685800"/>
-          </a:xfrm>
-          <a:prstGeom prst="rect">
-            <a:avLst/>
-          </a:prstGeom>
-          <a:noFill/>
-        </p:spPr>
-        <p:txBody>
-          <a:bodyPr wrap="square">
-            <a:spAutoFit/>
-          </a:bodyPr>
-          <a:lstStyle/>
-          <a:p>
-            <a:pPr algn="ctr"/>
-            <a:r>
-              <a:rPr sz="4400" b="1" i="0">
+            <a:off x="640080" y="2985516"/>
+            <a:ext cx="10911535" cy="731520"/>
+          </a:xfrm>
+          <a:prstGeom prst="rect">
+            <a:avLst/>
+          </a:prstGeom>
+          <a:noFill/>
+        </p:spPr>
+        <p:txBody>
+          <a:bodyPr wrap="square">
+            <a:spAutoFit/>
+          </a:bodyPr>
+          <a:lstStyle/>
+          <a:p>
+            <a:pPr algn="ctr"/>
+            <a:r>
+              <a:rPr sz="4800" b="1" i="0">
                 <a:solidFill>
                   <a:srgbClr val="FFFFFF"/>
                 </a:solidFill>
                 <a:latin typeface="Arial"/>
               </a:rPr>
-              <a:t>Se estás aqui, há liberdade</a:t>
+              <a:t>主イエスが希望</a:t>
             </a:r>
           </a:p>
         </p:txBody>
@@ -3390,29 +3392,99 @@
         </p:nvSpPr>
         <p:spPr>
           <a:xfrm>
-            <a:off x="594360" y="4251960"/>
-            <a:ext cx="11002975" cy="347472"/>
-          </a:xfrm>
-          <a:prstGeom prst="rect">
-            <a:avLst/>
-          </a:prstGeom>
-          <a:noFill/>
-        </p:spPr>
-        <p:txBody>
-          <a:bodyPr wrap="square">
-            <a:spAutoFit/>
-          </a:bodyPr>
-          <a:lstStyle/>
-          <a:p>
-            <a:pPr algn="ctr"/>
-            <a:r>
-              <a:rPr sz="2200" b="0" i="1">
-                <a:solidFill>
-                  <a:srgbClr val="8C8C8C"/>
-                </a:solidFill>
-                <a:latin typeface="Arial"/>
-              </a:rPr>
-              <a:t/>
+            <a:off x="640080" y="3753612"/>
+            <a:ext cx="10911535" cy="365760"/>
+          </a:xfrm>
+          <a:prstGeom prst="rect">
+            <a:avLst/>
+          </a:prstGeom>
+          <a:noFill/>
+        </p:spPr>
+        <p:txBody>
+          <a:bodyPr wrap="square">
+            <a:spAutoFit/>
+          </a:bodyPr>
+          <a:lstStyle/>
+          <a:p>
+            <a:pPr algn="ctr"/>
+            <a:r>
+              <a:rPr sz="2400" b="0" i="1">
+                <a:solidFill>
+                  <a:srgbClr val="AAAAAA"/>
+                </a:solidFill>
+                <a:latin typeface="Arial"/>
+              </a:rPr>
+              <a:t>Shu Iesuga Kibou</a:t>
+            </a:r>
+          </a:p>
+        </p:txBody>
+      </p:sp>
+      <p:sp>
+        <p:nvSpPr>
+          <p:cNvPr id="6" name="TextBox 5"/>
+          <p:cNvSpPr txBox="1"/>
+          <p:nvPr/>
+        </p:nvSpPr>
+        <p:spPr>
+          <a:xfrm>
+            <a:off x="640080" y="4530852"/>
+            <a:ext cx="10911535" cy="310896"/>
+          </a:xfrm>
+          <a:prstGeom prst="rect">
+            <a:avLst/>
+          </a:prstGeom>
+          <a:noFill/>
+        </p:spPr>
+        <p:txBody>
+          <a:bodyPr wrap="square">
+            <a:spAutoFit/>
+          </a:bodyPr>
+          <a:lstStyle/>
+          <a:p>
+            <a:pPr algn="ctr"/>
+            <a:r>
+              <a:rPr sz="2000" b="0" i="1">
+                <a:solidFill>
+                  <a:srgbClr val="828282"/>
+                </a:solidFill>
+                <a:latin typeface="Arial"/>
+              </a:rPr>
+              <a:t>Tua vida em mim é santidade</a:t>
+            </a:r>
+          </a:p>
+        </p:txBody>
+      </p:sp>
+      <p:sp>
+        <p:nvSpPr>
+          <p:cNvPr id="7" name="TextBox 6"/>
+          <p:cNvSpPr txBox="1"/>
+          <p:nvPr/>
+        </p:nvSpPr>
+        <p:spPr>
+          <a:xfrm>
+            <a:off x="640080" y="4896612"/>
+            <a:ext cx="10911535" cy="310896"/>
+          </a:xfrm>
+          <a:prstGeom prst="rect">
+            <a:avLst/>
+          </a:prstGeom>
+          <a:noFill/>
+        </p:spPr>
+        <p:txBody>
+          <a:bodyPr wrap="square">
+            <a:spAutoFit/>
+          </a:bodyPr>
+          <a:lstStyle/>
+          <a:p>
+            <a:pPr algn="ctr"/>
+            <a:r>
+              <a:rPr sz="2000" b="0" i="1">
+                <a:solidFill>
+                  <a:srgbClr val="828282"/>
+                </a:solidFill>
+                <a:latin typeface="Arial"/>
+              </a:rPr>
+              <a:t>Oh, Senhor, de Ti preciso</a:t>
             </a:r>
           </a:p>
         </p:txBody>
@@ -3451,29 +3523,29 @@
         </p:nvSpPr>
         <p:spPr>
           <a:xfrm>
-            <a:off x="594360" y="2258568"/>
-            <a:ext cx="11002975" cy="685800"/>
-          </a:xfrm>
-          <a:prstGeom prst="rect">
-            <a:avLst/>
-          </a:prstGeom>
-          <a:noFill/>
-        </p:spPr>
-        <p:txBody>
-          <a:bodyPr wrap="square">
-            <a:spAutoFit/>
-          </a:bodyPr>
-          <a:lstStyle/>
-          <a:p>
-            <a:pPr algn="ctr"/>
-            <a:r>
-              <a:rPr sz="4400" b="1" i="0">
+            <a:off x="640080" y="2052828"/>
+            <a:ext cx="10911535" cy="731520"/>
+          </a:xfrm>
+          <a:prstGeom prst="rect">
+            <a:avLst/>
+          </a:prstGeom>
+          <a:noFill/>
+        </p:spPr>
+        <p:txBody>
+          <a:bodyPr wrap="square">
+            <a:spAutoFit/>
+          </a:bodyPr>
+          <a:lstStyle/>
+          <a:p>
+            <a:pPr algn="ctr"/>
+            <a:r>
+              <a:rPr sz="4800" b="1" i="0">
                 <a:solidFill>
                   <a:srgbClr val="FFFFFF"/>
                 </a:solidFill>
                 <a:latin typeface="Arial"/>
               </a:rPr>
-              <a:t>Tua vida em mim é santidade</a:t>
+              <a:t>E onde há graça, Tu estás</a:t>
             </a:r>
           </a:p>
         </p:txBody>
@@ -3486,29 +3558,29 @@
         </p:nvSpPr>
         <p:spPr>
           <a:xfrm>
-            <a:off x="594360" y="2980944"/>
-            <a:ext cx="11002975" cy="347472"/>
-          </a:xfrm>
-          <a:prstGeom prst="rect">
-            <a:avLst/>
-          </a:prstGeom>
-          <a:noFill/>
-        </p:spPr>
-        <p:txBody>
-          <a:bodyPr wrap="square">
-            <a:spAutoFit/>
-          </a:bodyPr>
-          <a:lstStyle/>
-          <a:p>
-            <a:pPr algn="ctr"/>
-            <a:r>
-              <a:rPr sz="2200" b="0" i="1">
-                <a:solidFill>
-                  <a:srgbClr val="8C8C8C"/>
-                </a:solidFill>
-                <a:latin typeface="Arial"/>
-              </a:rPr>
-              <a:t/>
+            <a:off x="640080" y="2985516"/>
+            <a:ext cx="10911535" cy="731520"/>
+          </a:xfrm>
+          <a:prstGeom prst="rect">
+            <a:avLst/>
+          </a:prstGeom>
+          <a:noFill/>
+        </p:spPr>
+        <p:txBody>
+          <a:bodyPr wrap="square">
+            <a:spAutoFit/>
+          </a:bodyPr>
+          <a:lstStyle/>
+          <a:p>
+            <a:pPr algn="ctr"/>
+            <a:r>
+              <a:rPr sz="4800" b="1" i="0">
+                <a:solidFill>
+                  <a:srgbClr val="FFFFFF"/>
+                </a:solidFill>
+                <a:latin typeface="Arial"/>
+              </a:rPr>
+              <a:t>Se estás aqui, há liberdade</a:t>
             </a:r>
           </a:p>
         </p:txBody>
@@ -3521,29 +3593,29 @@
         </p:nvSpPr>
         <p:spPr>
           <a:xfrm>
-            <a:off x="594360" y="3529584"/>
-            <a:ext cx="11002975" cy="685800"/>
-          </a:xfrm>
-          <a:prstGeom prst="rect">
-            <a:avLst/>
-          </a:prstGeom>
-          <a:noFill/>
-        </p:spPr>
-        <p:txBody>
-          <a:bodyPr wrap="square">
-            <a:spAutoFit/>
-          </a:bodyPr>
-          <a:lstStyle/>
-          <a:p>
-            <a:pPr algn="ctr"/>
-            <a:r>
-              <a:rPr sz="4400" b="1" i="0">
-                <a:solidFill>
-                  <a:srgbClr val="FFFFFF"/>
-                </a:solidFill>
-                <a:latin typeface="Arial"/>
-              </a:rPr>
-              <a:t>Oh, Senhor, de Ti preciso</a:t>
+            <a:off x="640080" y="4128516"/>
+            <a:ext cx="10911535" cy="310896"/>
+          </a:xfrm>
+          <a:prstGeom prst="rect">
+            <a:avLst/>
+          </a:prstGeom>
+          <a:noFill/>
+        </p:spPr>
+        <p:txBody>
+          <a:bodyPr wrap="square">
+            <a:spAutoFit/>
+          </a:bodyPr>
+          <a:lstStyle/>
+          <a:p>
+            <a:pPr algn="ctr"/>
+            <a:r>
+              <a:rPr sz="2000" b="0" i="0">
+                <a:solidFill>
+                  <a:srgbClr val="828282"/>
+                </a:solidFill>
+                <a:latin typeface="Arial"/>
+              </a:rPr>
+              <a:t>主に立ち歌おう</a:t>
             </a:r>
           </a:p>
         </p:txBody>
@@ -3556,29 +3628,29 @@
         </p:nvSpPr>
         <p:spPr>
           <a:xfrm>
-            <a:off x="594360" y="4251960"/>
-            <a:ext cx="11002975" cy="347472"/>
-          </a:xfrm>
-          <a:prstGeom prst="rect">
-            <a:avLst/>
-          </a:prstGeom>
-          <a:noFill/>
-        </p:spPr>
-        <p:txBody>
-          <a:bodyPr wrap="square">
-            <a:spAutoFit/>
-          </a:bodyPr>
-          <a:lstStyle/>
-          <a:p>
-            <a:pPr algn="ctr"/>
-            <a:r>
-              <a:rPr sz="2200" b="0" i="1">
-                <a:solidFill>
-                  <a:srgbClr val="8C8C8C"/>
-                </a:solidFill>
-                <a:latin typeface="Arial"/>
-              </a:rPr>
-              <a:t/>
+            <a:off x="640080" y="4494276"/>
+            <a:ext cx="10911535" cy="310896"/>
+          </a:xfrm>
+          <a:prstGeom prst="rect">
+            <a:avLst/>
+          </a:prstGeom>
+          <a:noFill/>
+        </p:spPr>
+        <p:txBody>
+          <a:bodyPr wrap="square">
+            <a:spAutoFit/>
+          </a:bodyPr>
+          <a:lstStyle/>
+          <a:p>
+            <a:pPr algn="ctr"/>
+            <a:r>
+              <a:rPr sz="2000" b="0" i="0">
+                <a:solidFill>
+                  <a:srgbClr val="828282"/>
+                </a:solidFill>
+                <a:latin typeface="Arial"/>
+              </a:rPr>
+              <a:t>誘惑にあっても</a:t>
             </a:r>
           </a:p>
         </p:txBody>
@@ -3617,29 +3689,29 @@
         </p:nvSpPr>
         <p:spPr>
           <a:xfrm>
-            <a:off x="594360" y="2258568"/>
-            <a:ext cx="11002975" cy="685800"/>
-          </a:xfrm>
-          <a:prstGeom prst="rect">
-            <a:avLst/>
-          </a:prstGeom>
-          <a:noFill/>
-        </p:spPr>
-        <p:txBody>
-          <a:bodyPr wrap="square">
-            <a:spAutoFit/>
-          </a:bodyPr>
-          <a:lstStyle/>
-          <a:p>
-            <a:pPr algn="ctr"/>
-            <a:r>
-              <a:rPr sz="4400" b="1" i="0">
+            <a:off x="640080" y="2052828"/>
+            <a:ext cx="10911535" cy="731520"/>
+          </a:xfrm>
+          <a:prstGeom prst="rect">
+            <a:avLst/>
+          </a:prstGeom>
+          <a:noFill/>
+        </p:spPr>
+        <p:txBody>
+          <a:bodyPr wrap="square">
+            <a:spAutoFit/>
+          </a:bodyPr>
+          <a:lstStyle/>
+          <a:p>
+            <a:pPr algn="ctr"/>
+            <a:r>
+              <a:rPr sz="4800" b="1" i="0">
                 <a:solidFill>
                   <a:srgbClr val="FFFFFF"/>
                 </a:solidFill>
                 <a:latin typeface="Arial"/>
               </a:rPr>
-              <a:t>Mais e mais preciso</a:t>
+              <a:t>Tua vida em mim é santidade</a:t>
             </a:r>
           </a:p>
         </p:txBody>
@@ -3652,29 +3724,29 @@
         </p:nvSpPr>
         <p:spPr>
           <a:xfrm>
-            <a:off x="594360" y="2980944"/>
-            <a:ext cx="11002975" cy="347472"/>
-          </a:xfrm>
-          <a:prstGeom prst="rect">
-            <a:avLst/>
-          </a:prstGeom>
-          <a:noFill/>
-        </p:spPr>
-        <p:txBody>
-          <a:bodyPr wrap="square">
-            <a:spAutoFit/>
-          </a:bodyPr>
-          <a:lstStyle/>
-          <a:p>
-            <a:pPr algn="ctr"/>
-            <a:r>
-              <a:rPr sz="2200" b="0" i="1">
-                <a:solidFill>
-                  <a:srgbClr val="8C8C8C"/>
-                </a:solidFill>
-                <a:latin typeface="Arial"/>
-              </a:rPr>
-              <a:t/>
+            <a:off x="640080" y="2985516"/>
+            <a:ext cx="10911535" cy="731520"/>
+          </a:xfrm>
+          <a:prstGeom prst="rect">
+            <a:avLst/>
+          </a:prstGeom>
+          <a:noFill/>
+        </p:spPr>
+        <p:txBody>
+          <a:bodyPr wrap="square">
+            <a:spAutoFit/>
+          </a:bodyPr>
+          <a:lstStyle/>
+          <a:p>
+            <a:pPr algn="ctr"/>
+            <a:r>
+              <a:rPr sz="4800" b="1" i="0">
+                <a:solidFill>
+                  <a:srgbClr val="FFFFFF"/>
+                </a:solidFill>
+                <a:latin typeface="Arial"/>
+              </a:rPr>
+              <a:t>Oh, Senhor, de Ti preciso</a:t>
             </a:r>
           </a:p>
         </p:txBody>
@@ -3687,29 +3759,29 @@
         </p:nvSpPr>
         <p:spPr>
           <a:xfrm>
-            <a:off x="594360" y="3529584"/>
-            <a:ext cx="11002975" cy="685800"/>
-          </a:xfrm>
-          <a:prstGeom prst="rect">
-            <a:avLst/>
-          </a:prstGeom>
-          <a:noFill/>
-        </p:spPr>
-        <p:txBody>
-          <a:bodyPr wrap="square">
-            <a:spAutoFit/>
-          </a:bodyPr>
-          <a:lstStyle/>
-          <a:p>
-            <a:pPr algn="ctr"/>
-            <a:r>
-              <a:rPr sz="4400" b="1" i="0">
-                <a:solidFill>
-                  <a:srgbClr val="FFFFFF"/>
-                </a:solidFill>
-                <a:latin typeface="Arial"/>
-              </a:rPr>
-              <a:t>Meu defensor, justo e fiel</a:t>
+            <a:off x="640080" y="4128516"/>
+            <a:ext cx="10911535" cy="310896"/>
+          </a:xfrm>
+          <a:prstGeom prst="rect">
+            <a:avLst/>
+          </a:prstGeom>
+          <a:noFill/>
+        </p:spPr>
+        <p:txBody>
+          <a:bodyPr wrap="square">
+            <a:spAutoFit/>
+          </a:bodyPr>
+          <a:lstStyle/>
+          <a:p>
+            <a:pPr algn="ctr"/>
+            <a:r>
+              <a:rPr sz="2000" b="0" i="0">
+                <a:solidFill>
+                  <a:srgbClr val="828282"/>
+                </a:solidFill>
+                <a:latin typeface="Arial"/>
+              </a:rPr>
+              <a:t>倒れるときでさえ</a:t>
             </a:r>
           </a:p>
         </p:txBody>
@@ -3722,29 +3794,29 @@
         </p:nvSpPr>
         <p:spPr>
           <a:xfrm>
-            <a:off x="594360" y="4251960"/>
-            <a:ext cx="11002975" cy="347472"/>
-          </a:xfrm>
-          <a:prstGeom prst="rect">
-            <a:avLst/>
-          </a:prstGeom>
-          <a:noFill/>
-        </p:spPr>
-        <p:txBody>
-          <a:bodyPr wrap="square">
-            <a:spAutoFit/>
-          </a:bodyPr>
-          <a:lstStyle/>
-          <a:p>
-            <a:pPr algn="ctr"/>
-            <a:r>
-              <a:rPr sz="2200" b="0" i="1">
-                <a:solidFill>
-                  <a:srgbClr val="8C8C8C"/>
-                </a:solidFill>
-                <a:latin typeface="Arial"/>
-              </a:rPr>
-              <a:t/>
+            <a:off x="640080" y="4494276"/>
+            <a:ext cx="10911535" cy="310896"/>
+          </a:xfrm>
+          <a:prstGeom prst="rect">
+            <a:avLst/>
+          </a:prstGeom>
+          <a:noFill/>
+        </p:spPr>
+        <p:txBody>
+          <a:bodyPr wrap="square">
+            <a:spAutoFit/>
+          </a:bodyPr>
+          <a:lstStyle/>
+          <a:p>
+            <a:pPr algn="ctr"/>
+            <a:r>
+              <a:rPr sz="2000" b="0" i="0">
+                <a:solidFill>
+                  <a:srgbClr val="828282"/>
+                </a:solidFill>
+                <a:latin typeface="Arial"/>
+              </a:rPr>
+              <a:t>主イエスが希望</a:t>
             </a:r>
           </a:p>
         </p:txBody>
@@ -3783,29 +3855,29 @@
         </p:nvSpPr>
         <p:spPr>
           <a:xfrm>
-            <a:off x="594360" y="2258568"/>
-            <a:ext cx="11002975" cy="685800"/>
-          </a:xfrm>
-          <a:prstGeom prst="rect">
-            <a:avLst/>
-          </a:prstGeom>
-          <a:noFill/>
-        </p:spPr>
-        <p:txBody>
-          <a:bodyPr wrap="square">
-            <a:spAutoFit/>
-          </a:bodyPr>
-          <a:lstStyle/>
-          <a:p>
-            <a:pPr algn="ctr"/>
-            <a:r>
-              <a:rPr sz="4400" b="1" i="0">
+            <a:off x="640080" y="2052828"/>
+            <a:ext cx="10911535" cy="731520"/>
+          </a:xfrm>
+          <a:prstGeom prst="rect">
+            <a:avLst/>
+          </a:prstGeom>
+          <a:noFill/>
+        </p:spPr>
+        <p:txBody>
+          <a:bodyPr wrap="square">
+            <a:spAutoFit/>
+          </a:bodyPr>
+          <a:lstStyle/>
+          <a:p>
+            <a:pPr algn="ctr"/>
+            <a:r>
+              <a:rPr sz="4800" b="1" i="0">
                 <a:solidFill>
                   <a:srgbClr val="FFFFFF"/>
                 </a:solidFill>
                 <a:latin typeface="Arial"/>
               </a:rPr>
-              <a:t>Vem, habita em mim</a:t>
+              <a:t>Mais e mais preciso</a:t>
             </a:r>
           </a:p>
         </p:txBody>
@@ -3818,99 +3890,29 @@
         </p:nvSpPr>
         <p:spPr>
           <a:xfrm>
-            <a:off x="594360" y="2980944"/>
-            <a:ext cx="11002975" cy="347472"/>
-          </a:xfrm>
-          <a:prstGeom prst="rect">
-            <a:avLst/>
-          </a:prstGeom>
-          <a:noFill/>
-        </p:spPr>
-        <p:txBody>
-          <a:bodyPr wrap="square">
-            <a:spAutoFit/>
-          </a:bodyPr>
-          <a:lstStyle/>
-          <a:p>
-            <a:pPr algn="ctr"/>
-            <a:r>
-              <a:rPr sz="2200" b="0" i="1">
-                <a:solidFill>
-                  <a:srgbClr val="8C8C8C"/>
-                </a:solidFill>
-                <a:latin typeface="Arial"/>
-              </a:rPr>
-              <a:t/>
-            </a:r>
-          </a:p>
-        </p:txBody>
-      </p:sp>
-      <p:sp>
-        <p:nvSpPr>
-          <p:cNvPr id="4" name="TextBox 3"/>
-          <p:cNvSpPr txBox="1"/>
-          <p:nvPr/>
-        </p:nvSpPr>
-        <p:spPr>
-          <a:xfrm>
-            <a:off x="594360" y="3529584"/>
-            <a:ext cx="11002975" cy="685800"/>
-          </a:xfrm>
-          <a:prstGeom prst="rect">
-            <a:avLst/>
-          </a:prstGeom>
-          <a:noFill/>
-        </p:spPr>
-        <p:txBody>
-          <a:bodyPr wrap="square">
-            <a:spAutoFit/>
-          </a:bodyPr>
-          <a:lstStyle/>
-          <a:p>
-            <a:pPr algn="ctr"/>
-            <a:r>
-              <a:rPr sz="4400" b="1" i="0">
+            <a:off x="640080" y="2985516"/>
+            <a:ext cx="10911535" cy="731520"/>
+          </a:xfrm>
+          <a:prstGeom prst="rect">
+            <a:avLst/>
+          </a:prstGeom>
+          <a:noFill/>
+        </p:spPr>
+        <p:txBody>
+          <a:bodyPr wrap="square">
+            <a:spAutoFit/>
+          </a:bodyPr>
+          <a:lstStyle/>
+          <a:p>
+            <a:pPr algn="ctr"/>
+            <a:r>
+              <a:rPr sz="4800" b="1" i="0">
                 <a:solidFill>
                   <a:srgbClr val="FFFFFF"/>
                 </a:solidFill>
                 <a:latin typeface="Arial"/>
               </a:rPr>
-              <a:t>E quando a tentação surgir</a:t>
-            </a:r>
-          </a:p>
-        </p:txBody>
-      </p:sp>
-      <p:sp>
-        <p:nvSpPr>
-          <p:cNvPr id="5" name="TextBox 4"/>
-          <p:cNvSpPr txBox="1"/>
-          <p:nvPr/>
-        </p:nvSpPr>
-        <p:spPr>
-          <a:xfrm>
-            <a:off x="594360" y="4251960"/>
-            <a:ext cx="11002975" cy="347472"/>
-          </a:xfrm>
-          <a:prstGeom prst="rect">
-            <a:avLst/>
-          </a:prstGeom>
-          <a:noFill/>
-        </p:spPr>
-        <p:txBody>
-          <a:bodyPr wrap="square">
-            <a:spAutoFit/>
-          </a:bodyPr>
-          <a:lstStyle/>
-          <a:p>
-            <a:pPr algn="ctr"/>
-            <a:r>
-              <a:rPr sz="2200" b="0" i="1">
-                <a:solidFill>
-                  <a:srgbClr val="8C8C8C"/>
-                </a:solidFill>
-                <a:latin typeface="Arial"/>
-              </a:rPr>
-              <a:t/>
+              <a:t>Meu defensor, justo e fiel</a:t>
             </a:r>
           </a:p>
         </p:txBody>
@@ -3949,28 +3951,98 @@
         </p:nvSpPr>
         <p:spPr>
           <a:xfrm>
-            <a:off x="594360" y="1837944"/>
-            <a:ext cx="11002975" cy="685800"/>
-          </a:xfrm>
-          <a:prstGeom prst="rect">
-            <a:avLst/>
-          </a:prstGeom>
-          <a:noFill/>
-        </p:spPr>
-        <p:txBody>
-          <a:bodyPr wrap="square">
-            <a:spAutoFit/>
-          </a:bodyPr>
-          <a:lstStyle/>
-          <a:p>
-            <a:pPr algn="ctr"/>
-            <a:r>
-              <a:rPr sz="4400" b="1" i="0">
+            <a:off x="640080" y="2052828"/>
+            <a:ext cx="10911535" cy="731520"/>
+          </a:xfrm>
+          <a:prstGeom prst="rect">
+            <a:avLst/>
+          </a:prstGeom>
+          <a:noFill/>
+        </p:spPr>
+        <p:txBody>
+          <a:bodyPr wrap="square">
+            <a:spAutoFit/>
+          </a:bodyPr>
+          <a:lstStyle/>
+          <a:p>
+            <a:pPr algn="ctr"/>
+            <a:r>
+              <a:rPr sz="4800" b="1" i="0">
                 <a:solidFill>
                   <a:srgbClr val="FFFFFF"/>
                 </a:solidFill>
                 <a:latin typeface="Arial"/>
               </a:rPr>
+              <a:t>Vem, habita em mim</a:t>
+            </a:r>
+          </a:p>
+        </p:txBody>
+      </p:sp>
+      <p:sp>
+        <p:nvSpPr>
+          <p:cNvPr id="3" name="TextBox 2"/>
+          <p:cNvSpPr txBox="1"/>
+          <p:nvPr/>
+        </p:nvSpPr>
+        <p:spPr>
+          <a:xfrm>
+            <a:off x="640080" y="2985516"/>
+            <a:ext cx="10911535" cy="731520"/>
+          </a:xfrm>
+          <a:prstGeom prst="rect">
+            <a:avLst/>
+          </a:prstGeom>
+          <a:noFill/>
+        </p:spPr>
+        <p:txBody>
+          <a:bodyPr wrap="square">
+            <a:spAutoFit/>
+          </a:bodyPr>
+          <a:lstStyle/>
+          <a:p>
+            <a:pPr algn="ctr"/>
+            <a:r>
+              <a:rPr sz="4500" b="1" i="0">
+                <a:solidFill>
+                  <a:srgbClr val="FFFFFF"/>
+                </a:solidFill>
+                <a:latin typeface="Arial"/>
+              </a:rPr>
+              <a:t>Se estou perdido, encontro a graça</a:t>
+            </a:r>
+          </a:p>
+        </p:txBody>
+      </p:sp>
+      <p:sp>
+        <p:nvSpPr>
+          <p:cNvPr id="4" name="TextBox 3"/>
+          <p:cNvSpPr txBox="1"/>
+          <p:nvPr/>
+        </p:nvSpPr>
+        <p:spPr>
+          <a:xfrm>
+            <a:off x="640080" y="4128516"/>
+            <a:ext cx="10911535" cy="310896"/>
+          </a:xfrm>
+          <a:prstGeom prst="rect">
+            <a:avLst/>
+          </a:prstGeom>
+          <a:noFill/>
+        </p:spPr>
+        <p:txBody>
+          <a:bodyPr wrap="square">
+            <a:spAutoFit/>
+          </a:bodyPr>
+          <a:lstStyle/>
+          <a:p>
+            <a:pPr algn="ctr"/>
+            <a:r>
+              <a:rPr sz="2000" b="0" i="0">
+                <a:solidFill>
+                  <a:srgbClr val="828282"/>
+                </a:solidFill>
+                <a:latin typeface="Arial"/>
+              </a:rPr>
               <a:t>主　あなたが必要   どんなときにも</a:t>
             </a:r>
           </a:p>
@@ -3978,175 +4050,35 @@
       </p:sp>
       <p:sp>
         <p:nvSpPr>
-          <p:cNvPr id="3" name="TextBox 2"/>
-          <p:cNvSpPr txBox="1"/>
-          <p:nvPr/>
-        </p:nvSpPr>
-        <p:spPr>
-          <a:xfrm>
-            <a:off x="594360" y="2560320"/>
-            <a:ext cx="11002975" cy="384048"/>
-          </a:xfrm>
-          <a:prstGeom prst="rect">
-            <a:avLst/>
-          </a:prstGeom>
-          <a:noFill/>
-        </p:spPr>
-        <p:txBody>
-          <a:bodyPr wrap="square">
-            <a:spAutoFit/>
-          </a:bodyPr>
-          <a:lstStyle/>
-          <a:p>
-            <a:pPr algn="ctr"/>
-            <a:r>
-              <a:rPr sz="2400" b="0" i="1">
-                <a:solidFill>
-                  <a:srgbClr val="B4B4B4"/>
-                </a:solidFill>
-                <a:latin typeface="Arial"/>
-              </a:rPr>
-              <a:t>Shu Anataga Hitsuyou Do--na Tokinimo</a:t>
-            </a:r>
-          </a:p>
-        </p:txBody>
-      </p:sp>
-      <p:sp>
-        <p:nvSpPr>
-          <p:cNvPr id="4" name="TextBox 3"/>
-          <p:cNvSpPr txBox="1"/>
-          <p:nvPr/>
-        </p:nvSpPr>
-        <p:spPr>
-          <a:xfrm>
-            <a:off x="594360" y="2980944"/>
-            <a:ext cx="11002975" cy="347472"/>
-          </a:xfrm>
-          <a:prstGeom prst="rect">
-            <a:avLst/>
-          </a:prstGeom>
-          <a:noFill/>
-        </p:spPr>
-        <p:txBody>
-          <a:bodyPr wrap="square">
-            <a:spAutoFit/>
-          </a:bodyPr>
-          <a:lstStyle/>
-          <a:p>
-            <a:pPr algn="ctr"/>
-            <a:r>
-              <a:rPr sz="2000" b="0" i="1">
-                <a:solidFill>
-                  <a:srgbClr val="8C8C8C"/>
-                </a:solidFill>
-                <a:latin typeface="Arial"/>
-              </a:rPr>
-              <a:t/>
-            </a:r>
-          </a:p>
-        </p:txBody>
-      </p:sp>
-      <p:sp>
-        <p:nvSpPr>
           <p:cNvPr id="5" name="TextBox 4"/>
           <p:cNvSpPr txBox="1"/>
           <p:nvPr/>
         </p:nvSpPr>
         <p:spPr>
           <a:xfrm>
-            <a:off x="594360" y="3529584"/>
-            <a:ext cx="11002975" cy="685800"/>
-          </a:xfrm>
-          <a:prstGeom prst="rect">
-            <a:avLst/>
-          </a:prstGeom>
-          <a:noFill/>
-        </p:spPr>
-        <p:txBody>
-          <a:bodyPr wrap="square">
-            <a:spAutoFit/>
-          </a:bodyPr>
-          <a:lstStyle/>
-          <a:p>
-            <a:pPr algn="ctr"/>
-            <a:r>
-              <a:rPr sz="4400" b="1" i="0">
-                <a:solidFill>
-                  <a:srgbClr val="FFFFFF"/>
+            <a:off x="640080" y="4494276"/>
+            <a:ext cx="10911535" cy="310896"/>
+          </a:xfrm>
+          <a:prstGeom prst="rect">
+            <a:avLst/>
+          </a:prstGeom>
+          <a:noFill/>
+        </p:spPr>
+        <p:txBody>
+          <a:bodyPr wrap="square">
+            <a:spAutoFit/>
+          </a:bodyPr>
+          <a:lstStyle/>
+          <a:p>
+            <a:pPr algn="ctr"/>
+            <a:r>
+              <a:rPr sz="2000" b="0" i="0">
+                <a:solidFill>
+                  <a:srgbClr val="828282"/>
                 </a:solidFill>
                 <a:latin typeface="Arial"/>
               </a:rPr>
               <a:t>私の盾　正義      　あぁ　主が必要</a:t>
-            </a:r>
-          </a:p>
-        </p:txBody>
-      </p:sp>
-      <p:sp>
-        <p:nvSpPr>
-          <p:cNvPr id="6" name="TextBox 5"/>
-          <p:cNvSpPr txBox="1"/>
-          <p:nvPr/>
-        </p:nvSpPr>
-        <p:spPr>
-          <a:xfrm>
-            <a:off x="594360" y="4251960"/>
-            <a:ext cx="11002975" cy="384048"/>
-          </a:xfrm>
-          <a:prstGeom prst="rect">
-            <a:avLst/>
-          </a:prstGeom>
-          <a:noFill/>
-        </p:spPr>
-        <p:txBody>
-          <a:bodyPr wrap="square">
-            <a:spAutoFit/>
-          </a:bodyPr>
-          <a:lstStyle/>
-          <a:p>
-            <a:pPr algn="ctr"/>
-            <a:r>
-              <a:rPr sz="2400" b="0" i="1">
-                <a:solidFill>
-                  <a:srgbClr val="B4B4B4"/>
-                </a:solidFill>
-                <a:latin typeface="Arial"/>
-              </a:rPr>
-              <a:t>Watashino Tate Seigi   Aa Shuga Hitsuyou</a:t>
-            </a:r>
-          </a:p>
-        </p:txBody>
-      </p:sp>
-      <p:sp>
-        <p:nvSpPr>
-          <p:cNvPr id="7" name="TextBox 6"/>
-          <p:cNvSpPr txBox="1"/>
-          <p:nvPr/>
-        </p:nvSpPr>
-        <p:spPr>
-          <a:xfrm>
-            <a:off x="594360" y="4672584"/>
-            <a:ext cx="11002975" cy="347472"/>
-          </a:xfrm>
-          <a:prstGeom prst="rect">
-            <a:avLst/>
-          </a:prstGeom>
-          <a:noFill/>
-        </p:spPr>
-        <p:txBody>
-          <a:bodyPr wrap="square">
-            <a:spAutoFit/>
-          </a:bodyPr>
-          <a:lstStyle/>
-          <a:p>
-            <a:pPr algn="ctr"/>
-            <a:r>
-              <a:rPr sz="2000" b="0" i="1">
-                <a:solidFill>
-                  <a:srgbClr val="8C8C8C"/>
-                </a:solidFill>
-                <a:latin typeface="Arial"/>
-              </a:rPr>
-              <a:t/>
             </a:r>
           </a:p>
         </p:txBody>
@@ -4185,29 +4117,29 @@
         </p:nvSpPr>
         <p:spPr>
           <a:xfrm>
-            <a:off x="594360" y="2683764"/>
-            <a:ext cx="11002975" cy="685800"/>
-          </a:xfrm>
-          <a:prstGeom prst="rect">
-            <a:avLst/>
-          </a:prstGeom>
-          <a:noFill/>
-        </p:spPr>
-        <p:txBody>
-          <a:bodyPr wrap="square">
-            <a:spAutoFit/>
-          </a:bodyPr>
-          <a:lstStyle/>
-          <a:p>
-            <a:pPr algn="ctr"/>
-            <a:r>
-              <a:rPr sz="4400" b="1" i="0">
+            <a:off x="640080" y="2052828"/>
+            <a:ext cx="10911535" cy="731520"/>
+          </a:xfrm>
+          <a:prstGeom prst="rect">
+            <a:avLst/>
+          </a:prstGeom>
+          <a:noFill/>
+        </p:spPr>
+        <p:txBody>
+          <a:bodyPr wrap="square">
+            <a:spAutoFit/>
+          </a:bodyPr>
+          <a:lstStyle/>
+          <a:p>
+            <a:pPr algn="ctr"/>
+            <a:r>
+              <a:rPr sz="4800" b="1" i="0">
                 <a:solidFill>
                   <a:srgbClr val="FFFFFF"/>
                 </a:solidFill>
                 <a:latin typeface="Arial"/>
               </a:rPr>
-              <a:t>私の盾　正義　      あぁ　主が必要</a:t>
+              <a:t>Vem, habita em mim</a:t>
             </a:r>
           </a:p>
         </p:txBody>
@@ -4220,29 +4152,29 @@
         </p:nvSpPr>
         <p:spPr>
           <a:xfrm>
-            <a:off x="594360" y="3406140"/>
-            <a:ext cx="11002975" cy="384048"/>
-          </a:xfrm>
-          <a:prstGeom prst="rect">
-            <a:avLst/>
-          </a:prstGeom>
-          <a:noFill/>
-        </p:spPr>
-        <p:txBody>
-          <a:bodyPr wrap="square">
-            <a:spAutoFit/>
-          </a:bodyPr>
-          <a:lstStyle/>
-          <a:p>
-            <a:pPr algn="ctr"/>
-            <a:r>
-              <a:rPr sz="2400" b="0" i="1">
-                <a:solidFill>
-                  <a:srgbClr val="B4B4B4"/>
-                </a:solidFill>
-                <a:latin typeface="Arial"/>
-              </a:rPr>
-              <a:t>Watashino Tate Seigi   Aa Shuga Hitsuyou</a:t>
+            <a:off x="640080" y="2985516"/>
+            <a:ext cx="10911535" cy="731520"/>
+          </a:xfrm>
+          <a:prstGeom prst="rect">
+            <a:avLst/>
+          </a:prstGeom>
+          <a:noFill/>
+        </p:spPr>
+        <p:txBody>
+          <a:bodyPr wrap="square">
+            <a:spAutoFit/>
+          </a:bodyPr>
+          <a:lstStyle/>
+          <a:p>
+            <a:pPr algn="ctr"/>
+            <a:r>
+              <a:rPr sz="4800" b="1" i="0">
+                <a:solidFill>
+                  <a:srgbClr val="FFFFFF"/>
+                </a:solidFill>
+                <a:latin typeface="Arial"/>
+              </a:rPr>
+              <a:t>E quando a tentação surgir</a:t>
             </a:r>
           </a:p>
         </p:txBody>
@@ -4255,29 +4187,64 @@
         </p:nvSpPr>
         <p:spPr>
           <a:xfrm>
-            <a:off x="594360" y="3826764"/>
-            <a:ext cx="11002975" cy="347472"/>
-          </a:xfrm>
-          <a:prstGeom prst="rect">
-            <a:avLst/>
-          </a:prstGeom>
-          <a:noFill/>
-        </p:spPr>
-        <p:txBody>
-          <a:bodyPr wrap="square">
-            <a:spAutoFit/>
-          </a:bodyPr>
-          <a:lstStyle/>
-          <a:p>
-            <a:pPr algn="ctr"/>
-            <a:r>
-              <a:rPr sz="2000" b="0" i="1">
-                <a:solidFill>
-                  <a:srgbClr val="8C8C8C"/>
-                </a:solidFill>
-                <a:latin typeface="Arial"/>
-              </a:rPr>
-              <a:t/>
+            <a:off x="640080" y="4128516"/>
+            <a:ext cx="10911535" cy="310896"/>
+          </a:xfrm>
+          <a:prstGeom prst="rect">
+            <a:avLst/>
+          </a:prstGeom>
+          <a:noFill/>
+        </p:spPr>
+        <p:txBody>
+          <a:bodyPr wrap="square">
+            <a:spAutoFit/>
+          </a:bodyPr>
+          <a:lstStyle/>
+          <a:p>
+            <a:pPr algn="ctr"/>
+            <a:r>
+              <a:rPr sz="2000" b="0" i="0">
+                <a:solidFill>
+                  <a:srgbClr val="828282"/>
+                </a:solidFill>
+                <a:latin typeface="Arial"/>
+              </a:rPr>
+              <a:t>主　あなたが必要   どんなときにも</a:t>
+            </a:r>
+          </a:p>
+        </p:txBody>
+      </p:sp>
+      <p:sp>
+        <p:nvSpPr>
+          <p:cNvPr id="5" name="TextBox 4"/>
+          <p:cNvSpPr txBox="1"/>
+          <p:nvPr/>
+        </p:nvSpPr>
+        <p:spPr>
+          <a:xfrm>
+            <a:off x="640080" y="4494276"/>
+            <a:ext cx="10911535" cy="310896"/>
+          </a:xfrm>
+          <a:prstGeom prst="rect">
+            <a:avLst/>
+          </a:prstGeom>
+          <a:noFill/>
+        </p:spPr>
+        <p:txBody>
+          <a:bodyPr wrap="square">
+            <a:spAutoFit/>
+          </a:bodyPr>
+          <a:lstStyle/>
+          <a:p>
+            <a:pPr algn="ctr"/>
+            <a:r>
+              <a:rPr sz="2000" b="0" i="0">
+                <a:solidFill>
+                  <a:srgbClr val="828282"/>
+                </a:solidFill>
+                <a:latin typeface="Arial"/>
+              </a:rPr>
+              <a:t>私の盾　正義      　あぁ　主が必要</a:t>
             </a:r>
           </a:p>
         </p:txBody>
@@ -4316,64 +4283,396 @@
         </p:nvSpPr>
         <p:spPr>
           <a:xfrm>
-            <a:off x="594360" y="2894076"/>
-            <a:ext cx="11002975" cy="685800"/>
-          </a:xfrm>
-          <a:prstGeom prst="rect">
-            <a:avLst/>
-          </a:prstGeom>
-          <a:noFill/>
-        </p:spPr>
-        <p:txBody>
-          <a:bodyPr wrap="square">
-            <a:spAutoFit/>
-          </a:bodyPr>
-          <a:lstStyle/>
-          <a:p>
-            <a:pPr algn="ctr"/>
-            <a:r>
-              <a:rPr sz="4400" b="1" i="0">
+            <a:off x="640080" y="1650492"/>
+            <a:ext cx="10911535" cy="731520"/>
+          </a:xfrm>
+          <a:prstGeom prst="rect">
+            <a:avLst/>
+          </a:prstGeom>
+          <a:noFill/>
+        </p:spPr>
+        <p:txBody>
+          <a:bodyPr wrap="square">
+            <a:spAutoFit/>
+          </a:bodyPr>
+          <a:lstStyle/>
+          <a:p>
+            <a:pPr algn="ctr"/>
+            <a:r>
+              <a:rPr sz="4800" b="1" i="0">
                 <a:solidFill>
                   <a:srgbClr val="FFFFFF"/>
                 </a:solidFill>
                 <a:latin typeface="Arial"/>
               </a:rPr>
+              <a:t>主　あなたが必要   どんなときにも</a:t>
+            </a:r>
+          </a:p>
+        </p:txBody>
+      </p:sp>
+      <p:sp>
+        <p:nvSpPr>
+          <p:cNvPr id="3" name="TextBox 2"/>
+          <p:cNvSpPr txBox="1"/>
+          <p:nvPr/>
+        </p:nvSpPr>
+        <p:spPr>
+          <a:xfrm>
+            <a:off x="640080" y="2418588"/>
+            <a:ext cx="10911535" cy="365760"/>
+          </a:xfrm>
+          <a:prstGeom prst="rect">
+            <a:avLst/>
+          </a:prstGeom>
+          <a:noFill/>
+        </p:spPr>
+        <p:txBody>
+          <a:bodyPr wrap="square">
+            <a:spAutoFit/>
+          </a:bodyPr>
+          <a:lstStyle/>
+          <a:p>
+            <a:pPr algn="ctr"/>
+            <a:r>
+              <a:rPr sz="2400" b="0" i="1">
+                <a:solidFill>
+                  <a:srgbClr val="AAAAAA"/>
+                </a:solidFill>
+                <a:latin typeface="Arial"/>
+              </a:rPr>
+              <a:t>Shu Anataga Hitsuyou Do--na Tokinimo</a:t>
+            </a:r>
+          </a:p>
+        </p:txBody>
+      </p:sp>
+      <p:sp>
+        <p:nvSpPr>
+          <p:cNvPr id="4" name="TextBox 3"/>
+          <p:cNvSpPr txBox="1"/>
+          <p:nvPr/>
+        </p:nvSpPr>
+        <p:spPr>
+          <a:xfrm>
+            <a:off x="640080" y="2985516"/>
+            <a:ext cx="10911535" cy="731520"/>
+          </a:xfrm>
+          <a:prstGeom prst="rect">
+            <a:avLst/>
+          </a:prstGeom>
+          <a:noFill/>
+        </p:spPr>
+        <p:txBody>
+          <a:bodyPr wrap="square">
+            <a:spAutoFit/>
+          </a:bodyPr>
+          <a:lstStyle/>
+          <a:p>
+            <a:pPr algn="ctr"/>
+            <a:r>
+              <a:rPr sz="4800" b="1" i="0">
+                <a:solidFill>
+                  <a:srgbClr val="FFFFFF"/>
+                </a:solidFill>
+                <a:latin typeface="Arial"/>
+              </a:rPr>
+              <a:t>私の盾　正義      　あぁ　主が必要</a:t>
+            </a:r>
+          </a:p>
+        </p:txBody>
+      </p:sp>
+      <p:sp>
+        <p:nvSpPr>
+          <p:cNvPr id="5" name="TextBox 4"/>
+          <p:cNvSpPr txBox="1"/>
+          <p:nvPr/>
+        </p:nvSpPr>
+        <p:spPr>
+          <a:xfrm>
+            <a:off x="640080" y="3753612"/>
+            <a:ext cx="10911535" cy="365760"/>
+          </a:xfrm>
+          <a:prstGeom prst="rect">
+            <a:avLst/>
+          </a:prstGeom>
+          <a:noFill/>
+        </p:spPr>
+        <p:txBody>
+          <a:bodyPr wrap="square">
+            <a:spAutoFit/>
+          </a:bodyPr>
+          <a:lstStyle/>
+          <a:p>
+            <a:pPr algn="ctr"/>
+            <a:r>
+              <a:rPr sz="2400" b="0" i="1">
+                <a:solidFill>
+                  <a:srgbClr val="AAAAAA"/>
+                </a:solidFill>
+                <a:latin typeface="Arial"/>
+              </a:rPr>
+              <a:t>Watashino Tate Seigi   Aa Shuga Hitsuyou</a:t>
+            </a:r>
+          </a:p>
+        </p:txBody>
+      </p:sp>
+      <p:sp>
+        <p:nvSpPr>
+          <p:cNvPr id="6" name="TextBox 5"/>
+          <p:cNvSpPr txBox="1"/>
+          <p:nvPr/>
+        </p:nvSpPr>
+        <p:spPr>
+          <a:xfrm>
+            <a:off x="640080" y="4530852"/>
+            <a:ext cx="10911535" cy="310896"/>
+          </a:xfrm>
+          <a:prstGeom prst="rect">
+            <a:avLst/>
+          </a:prstGeom>
+          <a:noFill/>
+        </p:spPr>
+        <p:txBody>
+          <a:bodyPr wrap="square">
+            <a:spAutoFit/>
+          </a:bodyPr>
+          <a:lstStyle/>
+          <a:p>
+            <a:pPr algn="ctr"/>
+            <a:r>
+              <a:rPr sz="2000" b="0" i="1">
+                <a:solidFill>
+                  <a:srgbClr val="828282"/>
+                </a:solidFill>
+                <a:latin typeface="Arial"/>
+              </a:rPr>
+              <a:t>Vem, habita em mim</a:t>
+            </a:r>
+          </a:p>
+        </p:txBody>
+      </p:sp>
+      <p:sp>
+        <p:nvSpPr>
+          <p:cNvPr id="7" name="TextBox 6"/>
+          <p:cNvSpPr txBox="1"/>
+          <p:nvPr/>
+        </p:nvSpPr>
+        <p:spPr>
+          <a:xfrm>
+            <a:off x="640080" y="4896612"/>
+            <a:ext cx="10911535" cy="310896"/>
+          </a:xfrm>
+          <a:prstGeom prst="rect">
+            <a:avLst/>
+          </a:prstGeom>
+          <a:noFill/>
+        </p:spPr>
+        <p:txBody>
+          <a:bodyPr wrap="square">
+            <a:spAutoFit/>
+          </a:bodyPr>
+          <a:lstStyle/>
+          <a:p>
+            <a:pPr algn="ctr"/>
+            <a:r>
+              <a:rPr sz="2000" b="0" i="1">
+                <a:solidFill>
+                  <a:srgbClr val="828282"/>
+                </a:solidFill>
+                <a:latin typeface="Arial"/>
+              </a:rPr>
+              <a:t>Se estou perdido, encontro a graça</a:t>
+            </a:r>
+          </a:p>
+        </p:txBody>
+      </p:sp>
+    </p:spTree>
+  </p:cSld>
+  <p:clrMapOvr>
+    <a:masterClrMapping/>
+  </p:clrMapOvr>
+</p:sld>
+</file>
+
+<file path=ppt/slides/slide17.xml><?xml version="1.0" encoding="utf-8"?>
+<p:sld xmlns:a="http://schemas.openxmlformats.org/drawingml/2006/main" xmlns:p="http://schemas.openxmlformats.org/presentationml/2006/main" xmlns:r="http://schemas.openxmlformats.org/officeDocument/2006/relationships">
+  <p:cSld>
+    <p:bg>
+      <p:bgPr>
+        <a:solidFill>
+          <a:srgbClr val="000000"/>
+        </a:solidFill>
+        <a:effectLst/>
+      </p:bgPr>
+    </p:bg>
+    <p:spTree>
+      <p:nvGrpSpPr>
+        <p:cNvPr id="1" name=""/>
+        <p:cNvGrpSpPr/>
+        <p:nvPr/>
+      </p:nvGrpSpPr>
+      <p:grpSpPr/>
+      <p:sp>
+        <p:nvSpPr>
+          <p:cNvPr id="2" name="TextBox 1"/>
+          <p:cNvSpPr txBox="1"/>
+          <p:nvPr/>
+        </p:nvSpPr>
+        <p:spPr>
+          <a:xfrm>
+            <a:off x="640080" y="2500884"/>
+            <a:ext cx="10911535" cy="731520"/>
+          </a:xfrm>
+          <a:prstGeom prst="rect">
+            <a:avLst/>
+          </a:prstGeom>
+          <a:noFill/>
+        </p:spPr>
+        <p:txBody>
+          <a:bodyPr wrap="square">
+            <a:spAutoFit/>
+          </a:bodyPr>
+          <a:lstStyle/>
+          <a:p>
+            <a:pPr algn="ctr"/>
+            <a:r>
+              <a:rPr sz="4800" b="1" i="0">
+                <a:solidFill>
+                  <a:srgbClr val="FFFFFF"/>
+                </a:solidFill>
+                <a:latin typeface="Arial"/>
+              </a:rPr>
+              <a:t>私の盾　正義　      あぁ　主が必要</a:t>
+            </a:r>
+          </a:p>
+        </p:txBody>
+      </p:sp>
+      <p:sp>
+        <p:nvSpPr>
+          <p:cNvPr id="3" name="TextBox 2"/>
+          <p:cNvSpPr txBox="1"/>
+          <p:nvPr/>
+        </p:nvSpPr>
+        <p:spPr>
+          <a:xfrm>
+            <a:off x="640080" y="3268980"/>
+            <a:ext cx="10911535" cy="365760"/>
+          </a:xfrm>
+          <a:prstGeom prst="rect">
+            <a:avLst/>
+          </a:prstGeom>
+          <a:noFill/>
+        </p:spPr>
+        <p:txBody>
+          <a:bodyPr wrap="square">
+            <a:spAutoFit/>
+          </a:bodyPr>
+          <a:lstStyle/>
+          <a:p>
+            <a:pPr algn="ctr"/>
+            <a:r>
+              <a:rPr sz="2400" b="0" i="1">
+                <a:solidFill>
+                  <a:srgbClr val="AAAAAA"/>
+                </a:solidFill>
+                <a:latin typeface="Arial"/>
+              </a:rPr>
+              <a:t>Watashino Tate Seigi   Aa Shuga Hitsuyou</a:t>
+            </a:r>
+          </a:p>
+        </p:txBody>
+      </p:sp>
+      <p:sp>
+        <p:nvSpPr>
+          <p:cNvPr id="4" name="TextBox 3"/>
+          <p:cNvSpPr txBox="1"/>
+          <p:nvPr/>
+        </p:nvSpPr>
+        <p:spPr>
+          <a:xfrm>
+            <a:off x="640080" y="4046220"/>
+            <a:ext cx="10911535" cy="310896"/>
+          </a:xfrm>
+          <a:prstGeom prst="rect">
+            <a:avLst/>
+          </a:prstGeom>
+          <a:noFill/>
+        </p:spPr>
+        <p:txBody>
+          <a:bodyPr wrap="square">
+            <a:spAutoFit/>
+          </a:bodyPr>
+          <a:lstStyle/>
+          <a:p>
+            <a:pPr algn="ctr"/>
+            <a:r>
+              <a:rPr sz="2000" b="0" i="1">
+                <a:solidFill>
+                  <a:srgbClr val="828282"/>
+                </a:solidFill>
+                <a:latin typeface="Arial"/>
+              </a:rPr>
+              <a:t>Vem, habita em mim</a:t>
+            </a:r>
+          </a:p>
+        </p:txBody>
+      </p:sp>
+    </p:spTree>
+  </p:cSld>
+  <p:clrMapOvr>
+    <a:masterClrMapping/>
+  </p:clrMapOvr>
+</p:sld>
+</file>
+
+<file path=ppt/slides/slide18.xml><?xml version="1.0" encoding="utf-8"?>
+<p:sld xmlns:a="http://schemas.openxmlformats.org/drawingml/2006/main" xmlns:p="http://schemas.openxmlformats.org/presentationml/2006/main" xmlns:r="http://schemas.openxmlformats.org/officeDocument/2006/relationships">
+  <p:cSld>
+    <p:bg>
+      <p:bgPr>
+        <a:solidFill>
+          <a:srgbClr val="000000"/>
+        </a:solidFill>
+        <a:effectLst/>
+      </p:bgPr>
+    </p:bg>
+    <p:spTree>
+      <p:nvGrpSpPr>
+        <p:cNvPr id="1" name=""/>
+        <p:cNvGrpSpPr/>
+        <p:nvPr/>
+      </p:nvGrpSpPr>
+      <p:grpSpPr/>
+      <p:sp>
+        <p:nvSpPr>
+          <p:cNvPr id="2" name="TextBox 1"/>
+          <p:cNvSpPr txBox="1"/>
+          <p:nvPr/>
+        </p:nvSpPr>
+        <p:spPr>
+          <a:xfrm>
+            <a:off x="640080" y="2702052"/>
+            <a:ext cx="10911535" cy="731520"/>
+          </a:xfrm>
+          <a:prstGeom prst="rect">
+            <a:avLst/>
+          </a:prstGeom>
+          <a:noFill/>
+        </p:spPr>
+        <p:txBody>
+          <a:bodyPr wrap="square">
+            <a:spAutoFit/>
+          </a:bodyPr>
+          <a:lstStyle/>
+          <a:p>
+            <a:pPr algn="ctr"/>
+            <a:r>
+              <a:rPr sz="4800" b="1" i="0">
+                <a:solidFill>
+                  <a:srgbClr val="FFFFFF"/>
+                </a:solidFill>
+                <a:latin typeface="Arial"/>
+              </a:rPr>
               <a:t>Que minha vida cante a Ti</a:t>
-            </a:r>
-          </a:p>
-        </p:txBody>
-      </p:sp>
-      <p:sp>
-        <p:nvSpPr>
-          <p:cNvPr id="3" name="TextBox 2"/>
-          <p:cNvSpPr txBox="1"/>
-          <p:nvPr/>
-        </p:nvSpPr>
-        <p:spPr>
-          <a:xfrm>
-            <a:off x="594360" y="3616452"/>
-            <a:ext cx="11002975" cy="347472"/>
-          </a:xfrm>
-          <a:prstGeom prst="rect">
-            <a:avLst/>
-          </a:prstGeom>
-          <a:noFill/>
-        </p:spPr>
-        <p:txBody>
-          <a:bodyPr wrap="square">
-            <a:spAutoFit/>
-          </a:bodyPr>
-          <a:lstStyle/>
-          <a:p>
-            <a:pPr algn="ctr"/>
-            <a:r>
-              <a:rPr sz="2200" b="0" i="1">
-                <a:solidFill>
-                  <a:srgbClr val="8C8C8C"/>
-                </a:solidFill>
-                <a:latin typeface="Arial"/>
-              </a:rPr>
-              <a:t/>
             </a:r>
           </a:p>
         </p:txBody>
@@ -4412,23 +4711,23 @@
         </p:nvSpPr>
         <p:spPr>
           <a:xfrm>
-            <a:off x="594360" y="2258568"/>
-            <a:ext cx="11002975" cy="685800"/>
-          </a:xfrm>
-          <a:prstGeom prst="rect">
-            <a:avLst/>
-          </a:prstGeom>
-          <a:noFill/>
-        </p:spPr>
-        <p:txBody>
-          <a:bodyPr wrap="square">
-            <a:spAutoFit/>
-          </a:bodyPr>
-          <a:lstStyle/>
-          <a:p>
-            <a:pPr algn="ctr"/>
-            <a:r>
-              <a:rPr sz="4400" b="1" i="0">
+            <a:off x="640080" y="2052828"/>
+            <a:ext cx="10911535" cy="731520"/>
+          </a:xfrm>
+          <a:prstGeom prst="rect">
+            <a:avLst/>
+          </a:prstGeom>
+          <a:noFill/>
+        </p:spPr>
+        <p:txBody>
+          <a:bodyPr wrap="square">
+            <a:spAutoFit/>
+          </a:bodyPr>
+          <a:lstStyle/>
+          <a:p>
+            <a:pPr algn="ctr"/>
+            <a:r>
+              <a:rPr sz="4800" b="1" i="0">
                 <a:solidFill>
                   <a:srgbClr val="FFFFFF"/>
                 </a:solidFill>
@@ -4447,99 +4746,29 @@
         </p:nvSpPr>
         <p:spPr>
           <a:xfrm>
-            <a:off x="594360" y="2980944"/>
-            <a:ext cx="11002975" cy="347472"/>
-          </a:xfrm>
-          <a:prstGeom prst="rect">
-            <a:avLst/>
-          </a:prstGeom>
-          <a:noFill/>
-        </p:spPr>
-        <p:txBody>
-          <a:bodyPr wrap="square">
-            <a:spAutoFit/>
-          </a:bodyPr>
-          <a:lstStyle/>
-          <a:p>
-            <a:pPr algn="ctr"/>
-            <a:r>
-              <a:rPr sz="2200" b="0" i="1">
-                <a:solidFill>
-                  <a:srgbClr val="8C8C8C"/>
-                </a:solidFill>
-                <a:latin typeface="Arial"/>
-              </a:rPr>
-              <a:t/>
-            </a:r>
-          </a:p>
-        </p:txBody>
-      </p:sp>
-      <p:sp>
-        <p:nvSpPr>
-          <p:cNvPr id="4" name="TextBox 3"/>
-          <p:cNvSpPr txBox="1"/>
-          <p:nvPr/>
-        </p:nvSpPr>
-        <p:spPr>
-          <a:xfrm>
-            <a:off x="594360" y="3529584"/>
-            <a:ext cx="11002975" cy="685800"/>
-          </a:xfrm>
-          <a:prstGeom prst="rect">
-            <a:avLst/>
-          </a:prstGeom>
-          <a:noFill/>
-        </p:spPr>
-        <p:txBody>
-          <a:bodyPr wrap="square">
-            <a:spAutoFit/>
-          </a:bodyPr>
-          <a:lstStyle/>
-          <a:p>
-            <a:pPr algn="ctr"/>
-            <a:r>
-              <a:rPr sz="4400" b="1" i="0">
+            <a:off x="640080" y="2985516"/>
+            <a:ext cx="10911535" cy="731520"/>
+          </a:xfrm>
+          <a:prstGeom prst="rect">
+            <a:avLst/>
+          </a:prstGeom>
+          <a:noFill/>
+        </p:spPr>
+        <p:txBody>
+          <a:bodyPr wrap="square">
+            <a:spAutoFit/>
+          </a:bodyPr>
+          <a:lstStyle/>
+          <a:p>
+            <a:pPr algn="ctr"/>
+            <a:r>
+              <a:rPr sz="4800" b="1" i="0">
                 <a:solidFill>
                   <a:srgbClr val="FFFFFF"/>
                 </a:solidFill>
                 <a:latin typeface="Arial"/>
               </a:rPr>
               <a:t>Guia-me por Teu amor</a:t>
-            </a:r>
-          </a:p>
-        </p:txBody>
-      </p:sp>
-      <p:sp>
-        <p:nvSpPr>
-          <p:cNvPr id="5" name="TextBox 4"/>
-          <p:cNvSpPr txBox="1"/>
-          <p:nvPr/>
-        </p:nvSpPr>
-        <p:spPr>
-          <a:xfrm>
-            <a:off x="594360" y="4251960"/>
-            <a:ext cx="11002975" cy="347472"/>
-          </a:xfrm>
-          <a:prstGeom prst="rect">
-            <a:avLst/>
-          </a:prstGeom>
-          <a:noFill/>
-        </p:spPr>
-        <p:txBody>
-          <a:bodyPr wrap="square">
-            <a:spAutoFit/>
-          </a:bodyPr>
-          <a:lstStyle/>
-          <a:p>
-            <a:pPr algn="ctr"/>
-            <a:r>
-              <a:rPr sz="2200" b="0" i="1">
-                <a:solidFill>
-                  <a:srgbClr val="8C8C8C"/>
-                </a:solidFill>
-                <a:latin typeface="Arial"/>
-              </a:rPr>
-              <a:t/>
             </a:r>
           </a:p>
         </p:txBody>
@@ -4578,23 +4807,23 @@
         </p:nvSpPr>
         <p:spPr>
           <a:xfrm>
-            <a:off x="594360" y="1837944"/>
-            <a:ext cx="11002975" cy="685800"/>
-          </a:xfrm>
-          <a:prstGeom prst="rect">
-            <a:avLst/>
-          </a:prstGeom>
-          <a:noFill/>
-        </p:spPr>
-        <p:txBody>
-          <a:bodyPr wrap="square">
-            <a:spAutoFit/>
-          </a:bodyPr>
-          <a:lstStyle/>
-          <a:p>
-            <a:pPr algn="ctr"/>
-            <a:r>
-              <a:rPr sz="4400" b="1" i="0">
+            <a:off x="640080" y="1650492"/>
+            <a:ext cx="10911535" cy="731520"/>
+          </a:xfrm>
+          <a:prstGeom prst="rect">
+            <a:avLst/>
+          </a:prstGeom>
+          <a:noFill/>
+        </p:spPr>
+        <p:txBody>
+          <a:bodyPr wrap="square">
+            <a:spAutoFit/>
+          </a:bodyPr>
+          <a:lstStyle/>
+          <a:p>
+            <a:pPr algn="ctr"/>
+            <a:r>
+              <a:rPr sz="4800" b="1" i="0">
                 <a:solidFill>
                   <a:srgbClr val="FFFFFF"/>
                 </a:solidFill>
@@ -4613,8 +4842,8 @@
         </p:nvSpPr>
         <p:spPr>
           <a:xfrm>
-            <a:off x="594360" y="2560320"/>
-            <a:ext cx="11002975" cy="384048"/>
+            <a:off x="640080" y="2418588"/>
+            <a:ext cx="10911535" cy="365760"/>
           </a:xfrm>
           <a:prstGeom prst="rect">
             <a:avLst/>
@@ -4631,7 +4860,7 @@
             <a:r>
               <a:rPr sz="2400" b="0" i="1">
                 <a:solidFill>
-                  <a:srgbClr val="B4B4B4"/>
+                  <a:srgbClr val="AAAAAA"/>
                 </a:solidFill>
                 <a:latin typeface="Arial"/>
               </a:rPr>
@@ -4648,8 +4877,78 @@
         </p:nvSpPr>
         <p:spPr>
           <a:xfrm>
-            <a:off x="594360" y="2980944"/>
-            <a:ext cx="11002975" cy="347472"/>
+            <a:off x="640080" y="2985516"/>
+            <a:ext cx="10911535" cy="731520"/>
+          </a:xfrm>
+          <a:prstGeom prst="rect">
+            <a:avLst/>
+          </a:prstGeom>
+          <a:noFill/>
+        </p:spPr>
+        <p:txBody>
+          <a:bodyPr wrap="square">
+            <a:spAutoFit/>
+          </a:bodyPr>
+          <a:lstStyle/>
+          <a:p>
+            <a:pPr algn="ctr"/>
+            <a:r>
+              <a:rPr sz="4800" b="1" i="0">
+                <a:solidFill>
+                  <a:srgbClr val="FFFFFF"/>
+                </a:solidFill>
+                <a:latin typeface="Arial"/>
+              </a:rPr>
+              <a:t>主なしでは　砕かれ　主だけが みちびく</a:t>
+            </a:r>
+          </a:p>
+        </p:txBody>
+      </p:sp>
+      <p:sp>
+        <p:nvSpPr>
+          <p:cNvPr id="5" name="TextBox 4"/>
+          <p:cNvSpPr txBox="1"/>
+          <p:nvPr/>
+        </p:nvSpPr>
+        <p:spPr>
+          <a:xfrm>
+            <a:off x="640080" y="3753612"/>
+            <a:ext cx="10911535" cy="365760"/>
+          </a:xfrm>
+          <a:prstGeom prst="rect">
+            <a:avLst/>
+          </a:prstGeom>
+          <a:noFill/>
+        </p:spPr>
+        <p:txBody>
+          <a:bodyPr wrap="square">
+            <a:spAutoFit/>
+          </a:bodyPr>
+          <a:lstStyle/>
+          <a:p>
+            <a:pPr algn="ctr"/>
+            <a:r>
+              <a:rPr sz="2400" b="0" i="1">
+                <a:solidFill>
+                  <a:srgbClr val="AAAAAA"/>
+                </a:solidFill>
+                <a:latin typeface="Arial"/>
+              </a:rPr>
+              <a:t>Shu nashi dewa Kudakare Shu dakega Michibiku</a:t>
+            </a:r>
+          </a:p>
+        </p:txBody>
+      </p:sp>
+      <p:sp>
+        <p:nvSpPr>
+          <p:cNvPr id="6" name="TextBox 5"/>
+          <p:cNvSpPr txBox="1"/>
+          <p:nvPr/>
+        </p:nvSpPr>
+        <p:spPr>
+          <a:xfrm>
+            <a:off x="640080" y="4530852"/>
+            <a:ext cx="10911535" cy="310896"/>
           </a:xfrm>
           <a:prstGeom prst="rect">
             <a:avLst/>
@@ -4666,81 +4965,11 @@
             <a:r>
               <a:rPr sz="2000" b="0" i="1">
                 <a:solidFill>
-                  <a:srgbClr val="8C8C8C"/>
-                </a:solidFill>
-                <a:latin typeface="Arial"/>
-              </a:rPr>
-              <a:t/>
-            </a:r>
-          </a:p>
-        </p:txBody>
-      </p:sp>
-      <p:sp>
-        <p:nvSpPr>
-          <p:cNvPr id="5" name="TextBox 4"/>
-          <p:cNvSpPr txBox="1"/>
-          <p:nvPr/>
-        </p:nvSpPr>
-        <p:spPr>
-          <a:xfrm>
-            <a:off x="594360" y="3529584"/>
-            <a:ext cx="11002975" cy="685800"/>
-          </a:xfrm>
-          <a:prstGeom prst="rect">
-            <a:avLst/>
-          </a:prstGeom>
-          <a:noFill/>
-        </p:spPr>
-        <p:txBody>
-          <a:bodyPr wrap="square">
-            <a:spAutoFit/>
-          </a:bodyPr>
-          <a:lstStyle/>
-          <a:p>
-            <a:pPr algn="ctr"/>
-            <a:r>
-              <a:rPr sz="4400" b="1" i="0">
-                <a:solidFill>
-                  <a:srgbClr val="FFFFFF"/>
-                </a:solidFill>
-                <a:latin typeface="Arial"/>
-              </a:rPr>
-              <a:t>主なしでは　砕かれ　主だけが みちびく</a:t>
-            </a:r>
-          </a:p>
-        </p:txBody>
-      </p:sp>
-      <p:sp>
-        <p:nvSpPr>
-          <p:cNvPr id="6" name="TextBox 5"/>
-          <p:cNvSpPr txBox="1"/>
-          <p:nvPr/>
-        </p:nvSpPr>
-        <p:spPr>
-          <a:xfrm>
-            <a:off x="594360" y="4251960"/>
-            <a:ext cx="11002975" cy="384048"/>
-          </a:xfrm>
-          <a:prstGeom prst="rect">
-            <a:avLst/>
-          </a:prstGeom>
-          <a:noFill/>
-        </p:spPr>
-        <p:txBody>
-          <a:bodyPr wrap="square">
-            <a:spAutoFit/>
-          </a:bodyPr>
-          <a:lstStyle/>
-          <a:p>
-            <a:pPr algn="ctr"/>
-            <a:r>
-              <a:rPr sz="2290" b="0" i="1">
-                <a:solidFill>
-                  <a:srgbClr val="B4B4B4"/>
-                </a:solidFill>
-                <a:latin typeface="Arial"/>
-              </a:rPr>
-              <a:t>Shu nashi dewa Kudakare Shu dakega Michibiku</a:t>
+                  <a:srgbClr val="828282"/>
+                </a:solidFill>
+                <a:latin typeface="Arial"/>
+              </a:rPr>
+              <a:t>Venho a Ti me confessar</a:t>
             </a:r>
           </a:p>
         </p:txBody>
@@ -4753,8 +4982,8 @@
         </p:nvSpPr>
         <p:spPr>
           <a:xfrm>
-            <a:off x="594360" y="4672584"/>
-            <a:ext cx="11002975" cy="347472"/>
+            <a:off x="640080" y="4896612"/>
+            <a:ext cx="10911535" cy="310896"/>
           </a:xfrm>
           <a:prstGeom prst="rect">
             <a:avLst/>
@@ -4771,11 +5000,11 @@
             <a:r>
               <a:rPr sz="2000" b="0" i="1">
                 <a:solidFill>
-                  <a:srgbClr val="8C8C8C"/>
-                </a:solidFill>
-                <a:latin typeface="Arial"/>
-              </a:rPr>
-              <a:t/>
+                  <a:srgbClr val="828282"/>
+                </a:solidFill>
+                <a:latin typeface="Arial"/>
+              </a:rPr>
+              <a:t>Pra minha alma descansar</a:t>
             </a:r>
           </a:p>
         </p:txBody>
@@ -4814,23 +5043,23 @@
         </p:nvSpPr>
         <p:spPr>
           <a:xfrm>
-            <a:off x="594360" y="1837944"/>
-            <a:ext cx="11002975" cy="685800"/>
-          </a:xfrm>
-          <a:prstGeom prst="rect">
-            <a:avLst/>
-          </a:prstGeom>
-          <a:noFill/>
-        </p:spPr>
-        <p:txBody>
-          <a:bodyPr wrap="square">
-            <a:spAutoFit/>
-          </a:bodyPr>
-          <a:lstStyle/>
-          <a:p>
-            <a:pPr algn="ctr"/>
-            <a:r>
-              <a:rPr sz="4400" b="1" i="0">
+            <a:off x="640080" y="1650492"/>
+            <a:ext cx="10911535" cy="731520"/>
+          </a:xfrm>
+          <a:prstGeom prst="rect">
+            <a:avLst/>
+          </a:prstGeom>
+          <a:noFill/>
+        </p:spPr>
+        <p:txBody>
+          <a:bodyPr wrap="square">
+            <a:spAutoFit/>
+          </a:bodyPr>
+          <a:lstStyle/>
+          <a:p>
+            <a:pPr algn="ctr"/>
+            <a:r>
+              <a:rPr sz="4800" b="1" i="0">
                 <a:solidFill>
                   <a:srgbClr val="FFFFFF"/>
                 </a:solidFill>
@@ -4849,8 +5078,8 @@
         </p:nvSpPr>
         <p:spPr>
           <a:xfrm>
-            <a:off x="594360" y="2560320"/>
-            <a:ext cx="11002975" cy="384048"/>
+            <a:off x="640080" y="2418588"/>
+            <a:ext cx="10911535" cy="365760"/>
           </a:xfrm>
           <a:prstGeom prst="rect">
             <a:avLst/>
@@ -4867,7 +5096,7 @@
             <a:r>
               <a:rPr sz="2400" b="0" i="1">
                 <a:solidFill>
-                  <a:srgbClr val="B4B4B4"/>
+                  <a:srgbClr val="AAAAAA"/>
                 </a:solidFill>
                 <a:latin typeface="Arial"/>
               </a:rPr>
@@ -4884,8 +5113,78 @@
         </p:nvSpPr>
         <p:spPr>
           <a:xfrm>
-            <a:off x="594360" y="2980944"/>
-            <a:ext cx="11002975" cy="347472"/>
+            <a:off x="640080" y="2985516"/>
+            <a:ext cx="10911535" cy="731520"/>
+          </a:xfrm>
+          <a:prstGeom prst="rect">
+            <a:avLst/>
+          </a:prstGeom>
+          <a:noFill/>
+        </p:spPr>
+        <p:txBody>
+          <a:bodyPr wrap="square">
+            <a:spAutoFit/>
+          </a:bodyPr>
+          <a:lstStyle/>
+          <a:p>
+            <a:pPr algn="ctr"/>
+            <a:r>
+              <a:rPr sz="4800" b="1" i="0">
+                <a:solidFill>
+                  <a:srgbClr val="FFFFFF"/>
+                </a:solidFill>
+                <a:latin typeface="Arial"/>
+              </a:rPr>
+              <a:t>私の盾　正義      　あぁ　主が必要</a:t>
+            </a:r>
+          </a:p>
+        </p:txBody>
+      </p:sp>
+      <p:sp>
+        <p:nvSpPr>
+          <p:cNvPr id="5" name="TextBox 4"/>
+          <p:cNvSpPr txBox="1"/>
+          <p:nvPr/>
+        </p:nvSpPr>
+        <p:spPr>
+          <a:xfrm>
+            <a:off x="640080" y="3753612"/>
+            <a:ext cx="10911535" cy="365760"/>
+          </a:xfrm>
+          <a:prstGeom prst="rect">
+            <a:avLst/>
+          </a:prstGeom>
+          <a:noFill/>
+        </p:spPr>
+        <p:txBody>
+          <a:bodyPr wrap="square">
+            <a:spAutoFit/>
+          </a:bodyPr>
+          <a:lstStyle/>
+          <a:p>
+            <a:pPr algn="ctr"/>
+            <a:r>
+              <a:rPr sz="2400" b="0" i="1">
+                <a:solidFill>
+                  <a:srgbClr val="AAAAAA"/>
+                </a:solidFill>
+                <a:latin typeface="Arial"/>
+              </a:rPr>
+              <a:t>Watashino Tate Seigi   Aa Shuga Hitsuyou</a:t>
+            </a:r>
+          </a:p>
+        </p:txBody>
+      </p:sp>
+      <p:sp>
+        <p:nvSpPr>
+          <p:cNvPr id="6" name="TextBox 5"/>
+          <p:cNvSpPr txBox="1"/>
+          <p:nvPr/>
+        </p:nvSpPr>
+        <p:spPr>
+          <a:xfrm>
+            <a:off x="640080" y="4530852"/>
+            <a:ext cx="10911535" cy="310896"/>
           </a:xfrm>
           <a:prstGeom prst="rect">
             <a:avLst/>
@@ -4902,81 +5201,11 @@
             <a:r>
               <a:rPr sz="2000" b="0" i="1">
                 <a:solidFill>
-                  <a:srgbClr val="8C8C8C"/>
-                </a:solidFill>
-                <a:latin typeface="Arial"/>
-              </a:rPr>
-              <a:t/>
-            </a:r>
-          </a:p>
-        </p:txBody>
-      </p:sp>
-      <p:sp>
-        <p:nvSpPr>
-          <p:cNvPr id="5" name="TextBox 4"/>
-          <p:cNvSpPr txBox="1"/>
-          <p:nvPr/>
-        </p:nvSpPr>
-        <p:spPr>
-          <a:xfrm>
-            <a:off x="594360" y="3529584"/>
-            <a:ext cx="11002975" cy="685800"/>
-          </a:xfrm>
-          <a:prstGeom prst="rect">
-            <a:avLst/>
-          </a:prstGeom>
-          <a:noFill/>
-        </p:spPr>
-        <p:txBody>
-          <a:bodyPr wrap="square">
-            <a:spAutoFit/>
-          </a:bodyPr>
-          <a:lstStyle/>
-          <a:p>
-            <a:pPr algn="ctr"/>
-            <a:r>
-              <a:rPr sz="4400" b="1" i="0">
-                <a:solidFill>
-                  <a:srgbClr val="FFFFFF"/>
-                </a:solidFill>
-                <a:latin typeface="Arial"/>
-              </a:rPr>
-              <a:t>私の盾　正義      　あぁ　主が必要</a:t>
-            </a:r>
-          </a:p>
-        </p:txBody>
-      </p:sp>
-      <p:sp>
-        <p:nvSpPr>
-          <p:cNvPr id="6" name="TextBox 5"/>
-          <p:cNvSpPr txBox="1"/>
-          <p:nvPr/>
-        </p:nvSpPr>
-        <p:spPr>
-          <a:xfrm>
-            <a:off x="594360" y="4251960"/>
-            <a:ext cx="11002975" cy="384048"/>
-          </a:xfrm>
-          <a:prstGeom prst="rect">
-            <a:avLst/>
-          </a:prstGeom>
-          <a:noFill/>
-        </p:spPr>
-        <p:txBody>
-          <a:bodyPr wrap="square">
-            <a:spAutoFit/>
-          </a:bodyPr>
-          <a:lstStyle/>
-          <a:p>
-            <a:pPr algn="ctr"/>
-            <a:r>
-              <a:rPr sz="2400" b="0" i="1">
-                <a:solidFill>
-                  <a:srgbClr val="B4B4B4"/>
-                </a:solidFill>
-                <a:latin typeface="Arial"/>
-              </a:rPr>
-              <a:t>Watashino Tate Seigi   Aa Shuga Hitsuyou</a:t>
+                  <a:srgbClr val="828282"/>
+                </a:solidFill>
+                <a:latin typeface="Arial"/>
+              </a:rPr>
+              <a:t>Vem, habita em mim</a:t>
             </a:r>
           </a:p>
         </p:txBody>
@@ -4989,8 +5218,8 @@
         </p:nvSpPr>
         <p:spPr>
           <a:xfrm>
-            <a:off x="594360" y="4672584"/>
-            <a:ext cx="11002975" cy="347472"/>
+            <a:off x="640080" y="4896612"/>
+            <a:ext cx="10911535" cy="310896"/>
           </a:xfrm>
           <a:prstGeom prst="rect">
             <a:avLst/>
@@ -5007,11 +5236,11 @@
             <a:r>
               <a:rPr sz="2000" b="0" i="1">
                 <a:solidFill>
-                  <a:srgbClr val="8C8C8C"/>
-                </a:solidFill>
-                <a:latin typeface="Arial"/>
-              </a:rPr>
-              <a:t/>
+                  <a:srgbClr val="828282"/>
+                </a:solidFill>
+                <a:latin typeface="Arial"/>
+              </a:rPr>
+              <a:t>Se estou perdido, encontro a graça</a:t>
             </a:r>
           </a:p>
         </p:txBody>
@@ -5050,23 +5279,23 @@
         </p:nvSpPr>
         <p:spPr>
           <a:xfrm>
-            <a:off x="594360" y="2258568"/>
-            <a:ext cx="11002975" cy="685800"/>
-          </a:xfrm>
-          <a:prstGeom prst="rect">
-            <a:avLst/>
-          </a:prstGeom>
-          <a:noFill/>
-        </p:spPr>
-        <p:txBody>
-          <a:bodyPr wrap="square">
-            <a:spAutoFit/>
-          </a:bodyPr>
-          <a:lstStyle/>
-          <a:p>
-            <a:pPr algn="ctr"/>
-            <a:r>
-              <a:rPr sz="4400" b="1" i="0">
+            <a:off x="640080" y="2052828"/>
+            <a:ext cx="10911535" cy="731520"/>
+          </a:xfrm>
+          <a:prstGeom prst="rect">
+            <a:avLst/>
+          </a:prstGeom>
+          <a:noFill/>
+        </p:spPr>
+        <p:txBody>
+          <a:bodyPr wrap="square">
+            <a:spAutoFit/>
+          </a:bodyPr>
+          <a:lstStyle/>
+          <a:p>
+            <a:pPr algn="ctr"/>
+            <a:r>
+              <a:rPr sz="4800" b="1" i="0">
                 <a:solidFill>
                   <a:srgbClr val="FFFFFF"/>
                 </a:solidFill>
@@ -5085,99 +5314,29 @@
         </p:nvSpPr>
         <p:spPr>
           <a:xfrm>
-            <a:off x="594360" y="2980944"/>
-            <a:ext cx="11002975" cy="347472"/>
-          </a:xfrm>
-          <a:prstGeom prst="rect">
-            <a:avLst/>
-          </a:prstGeom>
-          <a:noFill/>
-        </p:spPr>
-        <p:txBody>
-          <a:bodyPr wrap="square">
-            <a:spAutoFit/>
-          </a:bodyPr>
-          <a:lstStyle/>
-          <a:p>
-            <a:pPr algn="ctr"/>
-            <a:r>
-              <a:rPr sz="2200" b="0" i="1">
-                <a:solidFill>
-                  <a:srgbClr val="8C8C8C"/>
-                </a:solidFill>
-                <a:latin typeface="Arial"/>
-              </a:rPr>
-              <a:t/>
-            </a:r>
-          </a:p>
-        </p:txBody>
-      </p:sp>
-      <p:sp>
-        <p:nvSpPr>
-          <p:cNvPr id="4" name="TextBox 3"/>
-          <p:cNvSpPr txBox="1"/>
-          <p:nvPr/>
-        </p:nvSpPr>
-        <p:spPr>
-          <a:xfrm>
-            <a:off x="594360" y="3529584"/>
-            <a:ext cx="11002975" cy="685800"/>
-          </a:xfrm>
-          <a:prstGeom prst="rect">
-            <a:avLst/>
-          </a:prstGeom>
-          <a:noFill/>
-        </p:spPr>
-        <p:txBody>
-          <a:bodyPr wrap="square">
-            <a:spAutoFit/>
-          </a:bodyPr>
-          <a:lstStyle/>
-          <a:p>
-            <a:pPr algn="ctr"/>
-            <a:r>
-              <a:rPr sz="4400" b="1" i="0">
+            <a:off x="640080" y="2985516"/>
+            <a:ext cx="10911535" cy="731520"/>
+          </a:xfrm>
+          <a:prstGeom prst="rect">
+            <a:avLst/>
+          </a:prstGeom>
+          <a:noFill/>
+        </p:spPr>
+        <p:txBody>
+          <a:bodyPr wrap="square">
+            <a:spAutoFit/>
+          </a:bodyPr>
+          <a:lstStyle/>
+          <a:p>
+            <a:pPr algn="ctr"/>
+            <a:r>
+              <a:rPr sz="4800" b="1" i="0">
                 <a:solidFill>
                   <a:srgbClr val="FFFFFF"/>
                 </a:solidFill>
                 <a:latin typeface="Arial"/>
               </a:rPr>
               <a:t>Mais e mais preciso</a:t>
-            </a:r>
-          </a:p>
-        </p:txBody>
-      </p:sp>
-      <p:sp>
-        <p:nvSpPr>
-          <p:cNvPr id="5" name="TextBox 4"/>
-          <p:cNvSpPr txBox="1"/>
-          <p:nvPr/>
-        </p:nvSpPr>
-        <p:spPr>
-          <a:xfrm>
-            <a:off x="594360" y="4251960"/>
-            <a:ext cx="11002975" cy="347472"/>
-          </a:xfrm>
-          <a:prstGeom prst="rect">
-            <a:avLst/>
-          </a:prstGeom>
-          <a:noFill/>
-        </p:spPr>
-        <p:txBody>
-          <a:bodyPr wrap="square">
-            <a:spAutoFit/>
-          </a:bodyPr>
-          <a:lstStyle/>
-          <a:p>
-            <a:pPr algn="ctr"/>
-            <a:r>
-              <a:rPr sz="2200" b="0" i="1">
-                <a:solidFill>
-                  <a:srgbClr val="8C8C8C"/>
-                </a:solidFill>
-                <a:latin typeface="Arial"/>
-              </a:rPr>
-              <a:t/>
             </a:r>
           </a:p>
         </p:txBody>
@@ -5216,64 +5375,29 @@
         </p:nvSpPr>
         <p:spPr>
           <a:xfrm>
-            <a:off x="594360" y="2894076"/>
-            <a:ext cx="11002975" cy="685800"/>
-          </a:xfrm>
-          <a:prstGeom prst="rect">
-            <a:avLst/>
-          </a:prstGeom>
-          <a:noFill/>
-        </p:spPr>
-        <p:txBody>
-          <a:bodyPr wrap="square">
-            <a:spAutoFit/>
-          </a:bodyPr>
-          <a:lstStyle/>
-          <a:p>
-            <a:pPr algn="ctr"/>
-            <a:r>
-              <a:rPr sz="4400" b="1" i="0">
+            <a:off x="640080" y="2702052"/>
+            <a:ext cx="10911535" cy="731520"/>
+          </a:xfrm>
+          <a:prstGeom prst="rect">
+            <a:avLst/>
+          </a:prstGeom>
+          <a:noFill/>
+        </p:spPr>
+        <p:txBody>
+          <a:bodyPr wrap="square">
+            <a:spAutoFit/>
+          </a:bodyPr>
+          <a:lstStyle/>
+          <a:p>
+            <a:pPr algn="ctr"/>
+            <a:r>
+              <a:rPr sz="4800" b="1" i="0">
                 <a:solidFill>
                   <a:srgbClr val="FFFFFF"/>
                 </a:solidFill>
                 <a:latin typeface="Arial"/>
               </a:rPr>
               <a:t>Meu defensor, justo e fiel</a:t>
-            </a:r>
-          </a:p>
-        </p:txBody>
-      </p:sp>
-      <p:sp>
-        <p:nvSpPr>
-          <p:cNvPr id="3" name="TextBox 2"/>
-          <p:cNvSpPr txBox="1"/>
-          <p:nvPr/>
-        </p:nvSpPr>
-        <p:spPr>
-          <a:xfrm>
-            <a:off x="594360" y="3616452"/>
-            <a:ext cx="11002975" cy="347472"/>
-          </a:xfrm>
-          <a:prstGeom prst="rect">
-            <a:avLst/>
-          </a:prstGeom>
-          <a:noFill/>
-        </p:spPr>
-        <p:txBody>
-          <a:bodyPr wrap="square">
-            <a:spAutoFit/>
-          </a:bodyPr>
-          <a:lstStyle/>
-          <a:p>
-            <a:pPr algn="ctr"/>
-            <a:r>
-              <a:rPr sz="2200" b="0" i="1">
-                <a:solidFill>
-                  <a:srgbClr val="8C8C8C"/>
-                </a:solidFill>
-                <a:latin typeface="Arial"/>
-              </a:rPr>
-              <a:t/>
             </a:r>
           </a:p>
         </p:txBody>
@@ -5312,23 +5436,23 @@
         </p:nvSpPr>
         <p:spPr>
           <a:xfrm>
-            <a:off x="594360" y="2258568"/>
-            <a:ext cx="11002975" cy="685800"/>
-          </a:xfrm>
-          <a:prstGeom prst="rect">
-            <a:avLst/>
-          </a:prstGeom>
-          <a:noFill/>
-        </p:spPr>
-        <p:txBody>
-          <a:bodyPr wrap="square">
-            <a:spAutoFit/>
-          </a:bodyPr>
-          <a:lstStyle/>
-          <a:p>
-            <a:pPr algn="ctr"/>
-            <a:r>
-              <a:rPr sz="4400" b="1" i="0">
+            <a:off x="640080" y="2052828"/>
+            <a:ext cx="10911535" cy="731520"/>
+          </a:xfrm>
+          <a:prstGeom prst="rect">
+            <a:avLst/>
+          </a:prstGeom>
+          <a:noFill/>
+        </p:spPr>
+        <p:txBody>
+          <a:bodyPr wrap="square">
+            <a:spAutoFit/>
+          </a:bodyPr>
+          <a:lstStyle/>
+          <a:p>
+            <a:pPr algn="ctr"/>
+            <a:r>
+              <a:rPr sz="4800" b="1" i="0">
                 <a:solidFill>
                   <a:srgbClr val="FFFFFF"/>
                 </a:solidFill>
@@ -5347,29 +5471,29 @@
         </p:nvSpPr>
         <p:spPr>
           <a:xfrm>
-            <a:off x="594360" y="2980944"/>
-            <a:ext cx="11002975" cy="347472"/>
-          </a:xfrm>
-          <a:prstGeom prst="rect">
-            <a:avLst/>
-          </a:prstGeom>
-          <a:noFill/>
-        </p:spPr>
-        <p:txBody>
-          <a:bodyPr wrap="square">
-            <a:spAutoFit/>
-          </a:bodyPr>
-          <a:lstStyle/>
-          <a:p>
-            <a:pPr algn="ctr"/>
-            <a:r>
-              <a:rPr sz="2200" b="0" i="1">
-                <a:solidFill>
-                  <a:srgbClr val="8C8C8C"/>
-                </a:solidFill>
-                <a:latin typeface="Arial"/>
-              </a:rPr>
-              <a:t/>
+            <a:off x="640080" y="2985516"/>
+            <a:ext cx="10911535" cy="731520"/>
+          </a:xfrm>
+          <a:prstGeom prst="rect">
+            <a:avLst/>
+          </a:prstGeom>
+          <a:noFill/>
+        </p:spPr>
+        <p:txBody>
+          <a:bodyPr wrap="square">
+            <a:spAutoFit/>
+          </a:bodyPr>
+          <a:lstStyle/>
+          <a:p>
+            <a:pPr algn="ctr"/>
+            <a:r>
+              <a:rPr sz="4500" b="1" i="0">
+                <a:solidFill>
+                  <a:srgbClr val="FFFFFF"/>
+                </a:solidFill>
+                <a:latin typeface="Arial"/>
+              </a:rPr>
+              <a:t>Se estou perdido, encontro a graça</a:t>
             </a:r>
           </a:p>
         </p:txBody>
@@ -5382,29 +5506,29 @@
         </p:nvSpPr>
         <p:spPr>
           <a:xfrm>
-            <a:off x="594360" y="3529584"/>
-            <a:ext cx="11002975" cy="685800"/>
-          </a:xfrm>
-          <a:prstGeom prst="rect">
-            <a:avLst/>
-          </a:prstGeom>
-          <a:noFill/>
-        </p:spPr>
-        <p:txBody>
-          <a:bodyPr wrap="square">
-            <a:spAutoFit/>
-          </a:bodyPr>
-          <a:lstStyle/>
-          <a:p>
-            <a:pPr algn="ctr"/>
-            <a:r>
-              <a:rPr sz="4141" b="1" i="0">
-                <a:solidFill>
-                  <a:srgbClr val="FFFFFF"/>
-                </a:solidFill>
-                <a:latin typeface="Arial"/>
-              </a:rPr>
-              <a:t>Se estou perdido, encontro a graça</a:t>
+            <a:off x="640080" y="4128516"/>
+            <a:ext cx="10911535" cy="310896"/>
+          </a:xfrm>
+          <a:prstGeom prst="rect">
+            <a:avLst/>
+          </a:prstGeom>
+          <a:noFill/>
+        </p:spPr>
+        <p:txBody>
+          <a:bodyPr wrap="square">
+            <a:spAutoFit/>
+          </a:bodyPr>
+          <a:lstStyle/>
+          <a:p>
+            <a:pPr algn="ctr"/>
+            <a:r>
+              <a:rPr sz="2000" b="0" i="0">
+                <a:solidFill>
+                  <a:srgbClr val="828282"/>
+                </a:solidFill>
+                <a:latin typeface="Arial"/>
+              </a:rPr>
+              <a:t>主　あなたが必要   どんなときにも</a:t>
             </a:r>
           </a:p>
         </p:txBody>
@@ -5417,29 +5541,29 @@
         </p:nvSpPr>
         <p:spPr>
           <a:xfrm>
-            <a:off x="594360" y="4251960"/>
-            <a:ext cx="11002975" cy="347472"/>
-          </a:xfrm>
-          <a:prstGeom prst="rect">
-            <a:avLst/>
-          </a:prstGeom>
-          <a:noFill/>
-        </p:spPr>
-        <p:txBody>
-          <a:bodyPr wrap="square">
-            <a:spAutoFit/>
-          </a:bodyPr>
-          <a:lstStyle/>
-          <a:p>
-            <a:pPr algn="ctr"/>
-            <a:r>
-              <a:rPr sz="2200" b="0" i="1">
-                <a:solidFill>
-                  <a:srgbClr val="8C8C8C"/>
-                </a:solidFill>
-                <a:latin typeface="Arial"/>
-              </a:rPr>
-              <a:t/>
+            <a:off x="640080" y="4494276"/>
+            <a:ext cx="10911535" cy="310896"/>
+          </a:xfrm>
+          <a:prstGeom prst="rect">
+            <a:avLst/>
+          </a:prstGeom>
+          <a:noFill/>
+        </p:spPr>
+        <p:txBody>
+          <a:bodyPr wrap="square">
+            <a:spAutoFit/>
+          </a:bodyPr>
+          <a:lstStyle/>
+          <a:p>
+            <a:pPr algn="ctr"/>
+            <a:r>
+              <a:rPr sz="2000" b="0" i="0">
+                <a:solidFill>
+                  <a:srgbClr val="828282"/>
+                </a:solidFill>
+                <a:latin typeface="Arial"/>
+              </a:rPr>
+              <a:t>私の盾　正義      　あぁ　主が必要</a:t>
             </a:r>
           </a:p>
         </p:txBody>
@@ -5478,29 +5602,29 @@
         </p:nvSpPr>
         <p:spPr>
           <a:xfrm>
-            <a:off x="594360" y="1837944"/>
-            <a:ext cx="11002975" cy="685800"/>
-          </a:xfrm>
-          <a:prstGeom prst="rect">
-            <a:avLst/>
-          </a:prstGeom>
-          <a:noFill/>
-        </p:spPr>
-        <p:txBody>
-          <a:bodyPr wrap="square">
-            <a:spAutoFit/>
-          </a:bodyPr>
-          <a:lstStyle/>
-          <a:p>
-            <a:pPr algn="ctr"/>
-            <a:r>
-              <a:rPr sz="4400" b="1" i="0">
+            <a:off x="640080" y="2052828"/>
+            <a:ext cx="10911535" cy="731520"/>
+          </a:xfrm>
+          <a:prstGeom prst="rect">
+            <a:avLst/>
+          </a:prstGeom>
+          <a:noFill/>
+        </p:spPr>
+        <p:txBody>
+          <a:bodyPr wrap="square">
+            <a:spAutoFit/>
+          </a:bodyPr>
+          <a:lstStyle/>
+          <a:p>
+            <a:pPr algn="ctr"/>
+            <a:r>
+              <a:rPr sz="4800" b="1" i="0">
                 <a:solidFill>
                   <a:srgbClr val="FFFFFF"/>
                 </a:solidFill>
                 <a:latin typeface="Arial"/>
               </a:rPr>
-              <a:t>主に立ち歌おう</a:t>
+              <a:t>Vem, habita em mim</a:t>
             </a:r>
           </a:p>
         </p:txBody>
@@ -5513,29 +5637,29 @@
         </p:nvSpPr>
         <p:spPr>
           <a:xfrm>
-            <a:off x="594360" y="2560320"/>
-            <a:ext cx="11002975" cy="384048"/>
-          </a:xfrm>
-          <a:prstGeom prst="rect">
-            <a:avLst/>
-          </a:prstGeom>
-          <a:noFill/>
-        </p:spPr>
-        <p:txBody>
-          <a:bodyPr wrap="square">
-            <a:spAutoFit/>
-          </a:bodyPr>
-          <a:lstStyle/>
-          <a:p>
-            <a:pPr algn="ctr"/>
-            <a:r>
-              <a:rPr sz="2400" b="0" i="1">
-                <a:solidFill>
-                  <a:srgbClr val="B4B4B4"/>
-                </a:solidFill>
-                <a:latin typeface="Arial"/>
-              </a:rPr>
-              <a:t>Shuni Tachi Utaou</a:t>
+            <a:off x="640080" y="2985516"/>
+            <a:ext cx="10911535" cy="731520"/>
+          </a:xfrm>
+          <a:prstGeom prst="rect">
+            <a:avLst/>
+          </a:prstGeom>
+          <a:noFill/>
+        </p:spPr>
+        <p:txBody>
+          <a:bodyPr wrap="square">
+            <a:spAutoFit/>
+          </a:bodyPr>
+          <a:lstStyle/>
+          <a:p>
+            <a:pPr algn="ctr"/>
+            <a:r>
+              <a:rPr sz="4800" b="1" i="0">
+                <a:solidFill>
+                  <a:srgbClr val="FFFFFF"/>
+                </a:solidFill>
+                <a:latin typeface="Arial"/>
+              </a:rPr>
+              <a:t>E quando a tentação surgir</a:t>
             </a:r>
           </a:p>
         </p:txBody>
@@ -5548,29 +5672,29 @@
         </p:nvSpPr>
         <p:spPr>
           <a:xfrm>
-            <a:off x="594360" y="2980944"/>
-            <a:ext cx="11002975" cy="347472"/>
-          </a:xfrm>
-          <a:prstGeom prst="rect">
-            <a:avLst/>
-          </a:prstGeom>
-          <a:noFill/>
-        </p:spPr>
-        <p:txBody>
-          <a:bodyPr wrap="square">
-            <a:spAutoFit/>
-          </a:bodyPr>
-          <a:lstStyle/>
-          <a:p>
-            <a:pPr algn="ctr"/>
-            <a:r>
-              <a:rPr sz="2000" b="0" i="1">
-                <a:solidFill>
-                  <a:srgbClr val="8C8C8C"/>
-                </a:solidFill>
-                <a:latin typeface="Arial"/>
-              </a:rPr>
-              <a:t/>
+            <a:off x="640080" y="4128516"/>
+            <a:ext cx="10911535" cy="310896"/>
+          </a:xfrm>
+          <a:prstGeom prst="rect">
+            <a:avLst/>
+          </a:prstGeom>
+          <a:noFill/>
+        </p:spPr>
+        <p:txBody>
+          <a:bodyPr wrap="square">
+            <a:spAutoFit/>
+          </a:bodyPr>
+          <a:lstStyle/>
+          <a:p>
+            <a:pPr algn="ctr"/>
+            <a:r>
+              <a:rPr sz="2000" b="0" i="0">
+                <a:solidFill>
+                  <a:srgbClr val="828282"/>
+                </a:solidFill>
+                <a:latin typeface="Arial"/>
+              </a:rPr>
+              <a:t>主　あなたが必要   どんなときにも</a:t>
             </a:r>
           </a:p>
         </p:txBody>
@@ -5583,99 +5707,29 @@
         </p:nvSpPr>
         <p:spPr>
           <a:xfrm>
-            <a:off x="594360" y="3529584"/>
-            <a:ext cx="11002975" cy="685800"/>
-          </a:xfrm>
-          <a:prstGeom prst="rect">
-            <a:avLst/>
-          </a:prstGeom>
-          <a:noFill/>
-        </p:spPr>
-        <p:txBody>
-          <a:bodyPr wrap="square">
-            <a:spAutoFit/>
-          </a:bodyPr>
-          <a:lstStyle/>
-          <a:p>
-            <a:pPr algn="ctr"/>
-            <a:r>
-              <a:rPr sz="4400" b="1" i="0">
-                <a:solidFill>
-                  <a:srgbClr val="FFFFFF"/>
-                </a:solidFill>
-                <a:latin typeface="Arial"/>
-              </a:rPr>
-              <a:t>誘惑にあっても</a:t>
-            </a:r>
-          </a:p>
-        </p:txBody>
-      </p:sp>
-      <p:sp>
-        <p:nvSpPr>
-          <p:cNvPr id="6" name="TextBox 5"/>
-          <p:cNvSpPr txBox="1"/>
-          <p:nvPr/>
-        </p:nvSpPr>
-        <p:spPr>
-          <a:xfrm>
-            <a:off x="594360" y="4251960"/>
-            <a:ext cx="11002975" cy="384048"/>
-          </a:xfrm>
-          <a:prstGeom prst="rect">
-            <a:avLst/>
-          </a:prstGeom>
-          <a:noFill/>
-        </p:spPr>
-        <p:txBody>
-          <a:bodyPr wrap="square">
-            <a:spAutoFit/>
-          </a:bodyPr>
-          <a:lstStyle/>
-          <a:p>
-            <a:pPr algn="ctr"/>
-            <a:r>
-              <a:rPr sz="2400" b="0" i="1">
-                <a:solidFill>
-                  <a:srgbClr val="B4B4B4"/>
-                </a:solidFill>
-                <a:latin typeface="Arial"/>
-              </a:rPr>
-              <a:t>Yuuwakuni Attemo</a:t>
-            </a:r>
-          </a:p>
-        </p:txBody>
-      </p:sp>
-      <p:sp>
-        <p:nvSpPr>
-          <p:cNvPr id="7" name="TextBox 6"/>
-          <p:cNvSpPr txBox="1"/>
-          <p:nvPr/>
-        </p:nvSpPr>
-        <p:spPr>
-          <a:xfrm>
-            <a:off x="594360" y="4672584"/>
-            <a:ext cx="11002975" cy="347472"/>
-          </a:xfrm>
-          <a:prstGeom prst="rect">
-            <a:avLst/>
-          </a:prstGeom>
-          <a:noFill/>
-        </p:spPr>
-        <p:txBody>
-          <a:bodyPr wrap="square">
-            <a:spAutoFit/>
-          </a:bodyPr>
-          <a:lstStyle/>
-          <a:p>
-            <a:pPr algn="ctr"/>
-            <a:r>
-              <a:rPr sz="2000" b="0" i="1">
-                <a:solidFill>
-                  <a:srgbClr val="8C8C8C"/>
-                </a:solidFill>
-                <a:latin typeface="Arial"/>
-              </a:rPr>
-              <a:t/>
+            <a:off x="640080" y="4494276"/>
+            <a:ext cx="10911535" cy="310896"/>
+          </a:xfrm>
+          <a:prstGeom prst="rect">
+            <a:avLst/>
+          </a:prstGeom>
+          <a:noFill/>
+        </p:spPr>
+        <p:txBody>
+          <a:bodyPr wrap="square">
+            <a:spAutoFit/>
+          </a:bodyPr>
+          <a:lstStyle/>
+          <a:p>
+            <a:pPr algn="ctr"/>
+            <a:r>
+              <a:rPr sz="2000" b="0" i="0">
+                <a:solidFill>
+                  <a:srgbClr val="828282"/>
+                </a:solidFill>
+                <a:latin typeface="Arial"/>
+              </a:rPr>
+              <a:t>私の盾　正義      　あぁ　主が必要</a:t>
             </a:r>
           </a:p>
         </p:txBody>
@@ -5714,29 +5768,29 @@
         </p:nvSpPr>
         <p:spPr>
           <a:xfrm>
-            <a:off x="594360" y="1837944"/>
-            <a:ext cx="11002975" cy="685800"/>
-          </a:xfrm>
-          <a:prstGeom prst="rect">
-            <a:avLst/>
-          </a:prstGeom>
-          <a:noFill/>
-        </p:spPr>
-        <p:txBody>
-          <a:bodyPr wrap="square">
-            <a:spAutoFit/>
-          </a:bodyPr>
-          <a:lstStyle/>
-          <a:p>
-            <a:pPr algn="ctr"/>
-            <a:r>
-              <a:rPr sz="4400" b="1" i="0">
+            <a:off x="640080" y="1650492"/>
+            <a:ext cx="10911535" cy="731520"/>
+          </a:xfrm>
+          <a:prstGeom prst="rect">
+            <a:avLst/>
+          </a:prstGeom>
+          <a:noFill/>
+        </p:spPr>
+        <p:txBody>
+          <a:bodyPr wrap="square">
+            <a:spAutoFit/>
+          </a:bodyPr>
+          <a:lstStyle/>
+          <a:p>
+            <a:pPr algn="ctr"/>
+            <a:r>
+              <a:rPr sz="4800" b="1" i="0">
                 <a:solidFill>
                   <a:srgbClr val="FFFFFF"/>
                 </a:solidFill>
                 <a:latin typeface="Arial"/>
               </a:rPr>
-              <a:t>倒れるときでさえ</a:t>
+              <a:t>主に立ち歌おう</a:t>
             </a:r>
           </a:p>
         </p:txBody>
@@ -5749,8 +5803,8 @@
         </p:nvSpPr>
         <p:spPr>
           <a:xfrm>
-            <a:off x="594360" y="2560320"/>
-            <a:ext cx="11002975" cy="384048"/>
+            <a:off x="640080" y="2418588"/>
+            <a:ext cx="10911535" cy="365760"/>
           </a:xfrm>
           <a:prstGeom prst="rect">
             <a:avLst/>
@@ -5767,11 +5821,11 @@
             <a:r>
               <a:rPr sz="2400" b="0" i="1">
                 <a:solidFill>
-                  <a:srgbClr val="B4B4B4"/>
-                </a:solidFill>
-                <a:latin typeface="Arial"/>
-              </a:rPr>
-              <a:t>Taoreru Toki de sae</a:t>
+                  <a:srgbClr val="AAAAAA"/>
+                </a:solidFill>
+                <a:latin typeface="Arial"/>
+              </a:rPr>
+              <a:t>Shuni Tachi Utaou</a:t>
             </a:r>
           </a:p>
         </p:txBody>
@@ -5784,8 +5838,78 @@
         </p:nvSpPr>
         <p:spPr>
           <a:xfrm>
-            <a:off x="594360" y="2980944"/>
-            <a:ext cx="11002975" cy="347472"/>
+            <a:off x="640080" y="2985516"/>
+            <a:ext cx="10911535" cy="731520"/>
+          </a:xfrm>
+          <a:prstGeom prst="rect">
+            <a:avLst/>
+          </a:prstGeom>
+          <a:noFill/>
+        </p:spPr>
+        <p:txBody>
+          <a:bodyPr wrap="square">
+            <a:spAutoFit/>
+          </a:bodyPr>
+          <a:lstStyle/>
+          <a:p>
+            <a:pPr algn="ctr"/>
+            <a:r>
+              <a:rPr sz="4800" b="1" i="0">
+                <a:solidFill>
+                  <a:srgbClr val="FFFFFF"/>
+                </a:solidFill>
+                <a:latin typeface="Arial"/>
+              </a:rPr>
+              <a:t>誘惑にあっても</a:t>
+            </a:r>
+          </a:p>
+        </p:txBody>
+      </p:sp>
+      <p:sp>
+        <p:nvSpPr>
+          <p:cNvPr id="5" name="TextBox 4"/>
+          <p:cNvSpPr txBox="1"/>
+          <p:nvPr/>
+        </p:nvSpPr>
+        <p:spPr>
+          <a:xfrm>
+            <a:off x="640080" y="3753612"/>
+            <a:ext cx="10911535" cy="365760"/>
+          </a:xfrm>
+          <a:prstGeom prst="rect">
+            <a:avLst/>
+          </a:prstGeom>
+          <a:noFill/>
+        </p:spPr>
+        <p:txBody>
+          <a:bodyPr wrap="square">
+            <a:spAutoFit/>
+          </a:bodyPr>
+          <a:lstStyle/>
+          <a:p>
+            <a:pPr algn="ctr"/>
+            <a:r>
+              <a:rPr sz="2400" b="0" i="1">
+                <a:solidFill>
+                  <a:srgbClr val="AAAAAA"/>
+                </a:solidFill>
+                <a:latin typeface="Arial"/>
+              </a:rPr>
+              <a:t>Yuuwakuni Attemo</a:t>
+            </a:r>
+          </a:p>
+        </p:txBody>
+      </p:sp>
+      <p:sp>
+        <p:nvSpPr>
+          <p:cNvPr id="6" name="TextBox 5"/>
+          <p:cNvSpPr txBox="1"/>
+          <p:nvPr/>
+        </p:nvSpPr>
+        <p:spPr>
+          <a:xfrm>
+            <a:off x="640080" y="4530852"/>
+            <a:ext cx="10911535" cy="310896"/>
           </a:xfrm>
           <a:prstGeom prst="rect">
             <a:avLst/>
@@ -5802,81 +5926,11 @@
             <a:r>
               <a:rPr sz="2000" b="0" i="1">
                 <a:solidFill>
-                  <a:srgbClr val="8C8C8C"/>
-                </a:solidFill>
-                <a:latin typeface="Arial"/>
-              </a:rPr>
-              <a:t/>
-            </a:r>
-          </a:p>
-        </p:txBody>
-      </p:sp>
-      <p:sp>
-        <p:nvSpPr>
-          <p:cNvPr id="5" name="TextBox 4"/>
-          <p:cNvSpPr txBox="1"/>
-          <p:nvPr/>
-        </p:nvSpPr>
-        <p:spPr>
-          <a:xfrm>
-            <a:off x="594360" y="3529584"/>
-            <a:ext cx="11002975" cy="685800"/>
-          </a:xfrm>
-          <a:prstGeom prst="rect">
-            <a:avLst/>
-          </a:prstGeom>
-          <a:noFill/>
-        </p:spPr>
-        <p:txBody>
-          <a:bodyPr wrap="square">
-            <a:spAutoFit/>
-          </a:bodyPr>
-          <a:lstStyle/>
-          <a:p>
-            <a:pPr algn="ctr"/>
-            <a:r>
-              <a:rPr sz="4400" b="1" i="0">
-                <a:solidFill>
-                  <a:srgbClr val="FFFFFF"/>
-                </a:solidFill>
-                <a:latin typeface="Arial"/>
-              </a:rPr>
-              <a:t>主イエスが希望</a:t>
-            </a:r>
-          </a:p>
-        </p:txBody>
-      </p:sp>
-      <p:sp>
-        <p:nvSpPr>
-          <p:cNvPr id="6" name="TextBox 5"/>
-          <p:cNvSpPr txBox="1"/>
-          <p:nvPr/>
-        </p:nvSpPr>
-        <p:spPr>
-          <a:xfrm>
-            <a:off x="594360" y="4251960"/>
-            <a:ext cx="11002975" cy="384048"/>
-          </a:xfrm>
-          <a:prstGeom prst="rect">
-            <a:avLst/>
-          </a:prstGeom>
-          <a:noFill/>
-        </p:spPr>
-        <p:txBody>
-          <a:bodyPr wrap="square">
-            <a:spAutoFit/>
-          </a:bodyPr>
-          <a:lstStyle/>
-          <a:p>
-            <a:pPr algn="ctr"/>
-            <a:r>
-              <a:rPr sz="2400" b="0" i="1">
-                <a:solidFill>
-                  <a:srgbClr val="B4B4B4"/>
-                </a:solidFill>
-                <a:latin typeface="Arial"/>
-              </a:rPr>
-              <a:t>Shu Iesuga Kibou</a:t>
+                  <a:srgbClr val="828282"/>
+                </a:solidFill>
+                <a:latin typeface="Arial"/>
+              </a:rPr>
+              <a:t>E onde há graça, Tu estás</a:t>
             </a:r>
           </a:p>
         </p:txBody>
@@ -5889,8 +5943,8 @@
         </p:nvSpPr>
         <p:spPr>
           <a:xfrm>
-            <a:off x="594360" y="4672584"/>
-            <a:ext cx="11002975" cy="347472"/>
+            <a:off x="640080" y="4896612"/>
+            <a:ext cx="10911535" cy="310896"/>
           </a:xfrm>
           <a:prstGeom prst="rect">
             <a:avLst/>
@@ -5907,11 +5961,11 @@
             <a:r>
               <a:rPr sz="2000" b="0" i="1">
                 <a:solidFill>
-                  <a:srgbClr val="8C8C8C"/>
-                </a:solidFill>
-                <a:latin typeface="Arial"/>
-              </a:rPr>
-              <a:t/>
+                  <a:srgbClr val="828282"/>
+                </a:solidFill>
+                <a:latin typeface="Arial"/>
+              </a:rPr>
+              <a:t>Se estás aqui, há liberdade</a:t>
             </a:r>
           </a:p>
         </p:txBody>

--- a/output_pptx/Lord_I_Need_You.pptx
+++ b/output_pptx/Lord_I_Need_You.pptx
@@ -3917,6 +3917,76 @@
           </a:p>
         </p:txBody>
       </p:sp>
+      <p:sp>
+        <p:nvSpPr>
+          <p:cNvPr id="4" name="TextBox 3"/>
+          <p:cNvSpPr txBox="1"/>
+          <p:nvPr/>
+        </p:nvSpPr>
+        <p:spPr>
+          <a:xfrm>
+            <a:off x="640080" y="4128516"/>
+            <a:ext cx="10911535" cy="310896"/>
+          </a:xfrm>
+          <a:prstGeom prst="rect">
+            <a:avLst/>
+          </a:prstGeom>
+          <a:noFill/>
+        </p:spPr>
+        <p:txBody>
+          <a:bodyPr wrap="square">
+            <a:spAutoFit/>
+          </a:bodyPr>
+          <a:lstStyle/>
+          <a:p>
+            <a:pPr algn="ctr"/>
+            <a:r>
+              <a:rPr sz="2000" b="0" i="0">
+                <a:solidFill>
+                  <a:srgbClr val="828282"/>
+                </a:solidFill>
+                <a:latin typeface="Arial"/>
+              </a:rPr>
+              <a:t>ますますあなたを必要としています</a:t>
+            </a:r>
+          </a:p>
+        </p:txBody>
+      </p:sp>
+      <p:sp>
+        <p:nvSpPr>
+          <p:cNvPr id="5" name="TextBox 4"/>
+          <p:cNvSpPr txBox="1"/>
+          <p:nvPr/>
+        </p:nvSpPr>
+        <p:spPr>
+          <a:xfrm>
+            <a:off x="640080" y="4494276"/>
+            <a:ext cx="10911535" cy="310896"/>
+          </a:xfrm>
+          <a:prstGeom prst="rect">
+            <a:avLst/>
+          </a:prstGeom>
+          <a:noFill/>
+        </p:spPr>
+        <p:txBody>
+          <a:bodyPr wrap="square">
+            <a:spAutoFit/>
+          </a:bodyPr>
+          <a:lstStyle/>
+          <a:p>
+            <a:pPr algn="ctr"/>
+            <a:r>
+              <a:rPr sz="2000" b="0" i="0">
+                <a:solidFill>
+                  <a:srgbClr val="828282"/>
+                </a:solidFill>
+                <a:latin typeface="Arial"/>
+              </a:rPr>
+              <a:t>私の守り手よ、正義と忠誠に満ちた方よ</a:t>
+            </a:r>
+          </a:p>
+        </p:txBody>
+      </p:sp>
     </p:spTree>
   </p:cSld>
   <p:clrMapOvr>
@@ -4677,6 +4747,41 @@
           </a:p>
         </p:txBody>
       </p:sp>
+      <p:sp>
+        <p:nvSpPr>
+          <p:cNvPr id="3" name="TextBox 2"/>
+          <p:cNvSpPr txBox="1"/>
+          <p:nvPr/>
+        </p:nvSpPr>
+        <p:spPr>
+          <a:xfrm>
+            <a:off x="640080" y="3845052"/>
+            <a:ext cx="10911535" cy="310896"/>
+          </a:xfrm>
+          <a:prstGeom prst="rect">
+            <a:avLst/>
+          </a:prstGeom>
+          <a:noFill/>
+        </p:spPr>
+        <p:txBody>
+          <a:bodyPr wrap="square">
+            <a:spAutoFit/>
+          </a:bodyPr>
+          <a:lstStyle/>
+          <a:p>
+            <a:pPr algn="ctr"/>
+            <a:r>
+              <a:rPr sz="2000" b="0" i="0">
+                <a:solidFill>
+                  <a:srgbClr val="828282"/>
+                </a:solidFill>
+                <a:latin typeface="Arial"/>
+              </a:rPr>
+              <a:t>私の人生があなたに歌いかけますように</a:t>
+            </a:r>
+          </a:p>
+        </p:txBody>
+      </p:sp>
     </p:spTree>
   </p:cSld>
   <p:clrMapOvr>
@@ -4773,6 +4878,76 @@
           </a:p>
         </p:txBody>
       </p:sp>
+      <p:sp>
+        <p:nvSpPr>
+          <p:cNvPr id="4" name="TextBox 3"/>
+          <p:cNvSpPr txBox="1"/>
+          <p:nvPr/>
+        </p:nvSpPr>
+        <p:spPr>
+          <a:xfrm>
+            <a:off x="640080" y="4128516"/>
+            <a:ext cx="10911535" cy="310896"/>
+          </a:xfrm>
+          <a:prstGeom prst="rect">
+            <a:avLst/>
+          </a:prstGeom>
+          <a:noFill/>
+        </p:spPr>
+        <p:txBody>
+          <a:bodyPr wrap="square">
+            <a:spAutoFit/>
+          </a:bodyPr>
+          <a:lstStyle/>
+          <a:p>
+            <a:pPr algn="ctr"/>
+            <a:r>
+              <a:rPr sz="2000" b="0" i="0">
+                <a:solidFill>
+                  <a:srgbClr val="828282"/>
+                </a:solidFill>
+                <a:latin typeface="Arial"/>
+              </a:rPr>
+              <a:t>あなたの手がなければ、私は迷っています</a:t>
+            </a:r>
+          </a:p>
+        </p:txBody>
+      </p:sp>
+      <p:sp>
+        <p:nvSpPr>
+          <p:cNvPr id="5" name="TextBox 4"/>
+          <p:cNvSpPr txBox="1"/>
+          <p:nvPr/>
+        </p:nvSpPr>
+        <p:spPr>
+          <a:xfrm>
+            <a:off x="640080" y="4494276"/>
+            <a:ext cx="10911535" cy="310896"/>
+          </a:xfrm>
+          <a:prstGeom prst="rect">
+            <a:avLst/>
+          </a:prstGeom>
+          <a:noFill/>
+        </p:spPr>
+        <p:txBody>
+          <a:bodyPr wrap="square">
+            <a:spAutoFit/>
+          </a:bodyPr>
+          <a:lstStyle/>
+          <a:p>
+            <a:pPr algn="ctr"/>
+            <a:r>
+              <a:rPr sz="2000" b="0" i="0">
+                <a:solidFill>
+                  <a:srgbClr val="828282"/>
+                </a:solidFill>
+                <a:latin typeface="Arial"/>
+              </a:rPr>
+              <a:t>あなたの愛で私を導いてください</a:t>
+            </a:r>
+          </a:p>
+        </p:txBody>
+      </p:sp>
     </p:spTree>
   </p:cSld>
   <p:clrMapOvr>
@@ -5341,6 +5516,76 @@
           </a:p>
         </p:txBody>
       </p:sp>
+      <p:sp>
+        <p:nvSpPr>
+          <p:cNvPr id="4" name="TextBox 3"/>
+          <p:cNvSpPr txBox="1"/>
+          <p:nvPr/>
+        </p:nvSpPr>
+        <p:spPr>
+          <a:xfrm>
+            <a:off x="640080" y="4128516"/>
+            <a:ext cx="10911535" cy="310896"/>
+          </a:xfrm>
+          <a:prstGeom prst="rect">
+            <a:avLst/>
+          </a:prstGeom>
+          <a:noFill/>
+        </p:spPr>
+        <p:txBody>
+          <a:bodyPr wrap="square">
+            <a:spAutoFit/>
+          </a:bodyPr>
+          <a:lstStyle/>
+          <a:p>
+            <a:pPr algn="ctr"/>
+            <a:r>
+              <a:rPr sz="2000" b="0" i="0">
+                <a:solidFill>
+                  <a:srgbClr val="828282"/>
+                </a:solidFill>
+                <a:latin typeface="Arial"/>
+              </a:rPr>
+              <a:t>おお、主よ、私はあなたを必要としています</a:t>
+            </a:r>
+          </a:p>
+        </p:txBody>
+      </p:sp>
+      <p:sp>
+        <p:nvSpPr>
+          <p:cNvPr id="5" name="TextBox 4"/>
+          <p:cNvSpPr txBox="1"/>
+          <p:nvPr/>
+        </p:nvSpPr>
+        <p:spPr>
+          <a:xfrm>
+            <a:off x="640080" y="4494276"/>
+            <a:ext cx="10911535" cy="310896"/>
+          </a:xfrm>
+          <a:prstGeom prst="rect">
+            <a:avLst/>
+          </a:prstGeom>
+          <a:noFill/>
+        </p:spPr>
+        <p:txBody>
+          <a:bodyPr wrap="square">
+            <a:spAutoFit/>
+          </a:bodyPr>
+          <a:lstStyle/>
+          <a:p>
+            <a:pPr algn="ctr"/>
+            <a:r>
+              <a:rPr sz="2000" b="0" i="0">
+                <a:solidFill>
+                  <a:srgbClr val="828282"/>
+                </a:solidFill>
+                <a:latin typeface="Arial"/>
+              </a:rPr>
+              <a:t>ますますあなたを必要としています</a:t>
+            </a:r>
+          </a:p>
+        </p:txBody>
+      </p:sp>
     </p:spTree>
   </p:cSld>
   <p:clrMapOvr>
@@ -5398,6 +5643,41 @@
                 <a:latin typeface="Arial"/>
               </a:rPr>
               <a:t>Meu defensor, justo e fiel</a:t>
+            </a:r>
+          </a:p>
+        </p:txBody>
+      </p:sp>
+      <p:sp>
+        <p:nvSpPr>
+          <p:cNvPr id="3" name="TextBox 2"/>
+          <p:cNvSpPr txBox="1"/>
+          <p:nvPr/>
+        </p:nvSpPr>
+        <p:spPr>
+          <a:xfrm>
+            <a:off x="640080" y="3845052"/>
+            <a:ext cx="10911535" cy="310896"/>
+          </a:xfrm>
+          <a:prstGeom prst="rect">
+            <a:avLst/>
+          </a:prstGeom>
+          <a:noFill/>
+        </p:spPr>
+        <p:txBody>
+          <a:bodyPr wrap="square">
+            <a:spAutoFit/>
+          </a:bodyPr>
+          <a:lstStyle/>
+          <a:p>
+            <a:pPr algn="ctr"/>
+            <a:r>
+              <a:rPr sz="2000" b="0" i="0">
+                <a:solidFill>
+                  <a:srgbClr val="828282"/>
+                </a:solidFill>
+                <a:latin typeface="Arial"/>
+              </a:rPr>
+              <a:t>私の守り手よ、正義と忠誠に満ちた方よ</a:t>
             </a:r>
           </a:p>
         </p:txBody>
